--- a/presentation.pptx
+++ b/presentation.pptx
@@ -2,7 +2,7 @@
 <file path=ppt/presentation.xml><?xml version="1.0" encoding="utf-8"?>
 <p:presentation xmlns:a="http://schemas.openxmlformats.org/drawingml/2006/main" xmlns:r="http://schemas.openxmlformats.org/officeDocument/2006/relationships" xmlns:p="http://schemas.openxmlformats.org/presentationml/2006/main" saveSubsetFonts="1">
   <p:sldMasterIdLst>
-    <p:sldMasterId id="2147483648" r:id="rId1"/>
+    <p:sldMasterId id="2147483660" r:id="rId1"/>
   </p:sldMasterIdLst>
   <p:sldIdLst>
     <p:sldId id="256" r:id="rId2"/>
@@ -17,7 +17,7 @@
     <a:defPPr>
       <a:defRPr lang="en-US"/>
     </a:defPPr>
-    <a:lvl1pPr marL="0" algn="l" defTabSz="914400" rtl="0" eaLnBrk="1" latinLnBrk="0" hangingPunct="1">
+    <a:lvl1pPr marL="0" algn="l" defTabSz="457200" rtl="0" eaLnBrk="1" latinLnBrk="0" hangingPunct="1">
       <a:defRPr sz="1800" kern="1200">
         <a:solidFill>
           <a:schemeClr val="tx1"/>
@@ -27,7 +27,7 @@
         <a:cs typeface="+mn-cs"/>
       </a:defRPr>
     </a:lvl1pPr>
-    <a:lvl2pPr marL="457200" algn="l" defTabSz="914400" rtl="0" eaLnBrk="1" latinLnBrk="0" hangingPunct="1">
+    <a:lvl2pPr marL="457200" algn="l" defTabSz="457200" rtl="0" eaLnBrk="1" latinLnBrk="0" hangingPunct="1">
       <a:defRPr sz="1800" kern="1200">
         <a:solidFill>
           <a:schemeClr val="tx1"/>
@@ -37,7 +37,7 @@
         <a:cs typeface="+mn-cs"/>
       </a:defRPr>
     </a:lvl2pPr>
-    <a:lvl3pPr marL="914400" algn="l" defTabSz="914400" rtl="0" eaLnBrk="1" latinLnBrk="0" hangingPunct="1">
+    <a:lvl3pPr marL="914400" algn="l" defTabSz="457200" rtl="0" eaLnBrk="1" latinLnBrk="0" hangingPunct="1">
       <a:defRPr sz="1800" kern="1200">
         <a:solidFill>
           <a:schemeClr val="tx1"/>
@@ -47,7 +47,7 @@
         <a:cs typeface="+mn-cs"/>
       </a:defRPr>
     </a:lvl3pPr>
-    <a:lvl4pPr marL="1371600" algn="l" defTabSz="914400" rtl="0" eaLnBrk="1" latinLnBrk="0" hangingPunct="1">
+    <a:lvl4pPr marL="1371600" algn="l" defTabSz="457200" rtl="0" eaLnBrk="1" latinLnBrk="0" hangingPunct="1">
       <a:defRPr sz="1800" kern="1200">
         <a:solidFill>
           <a:schemeClr val="tx1"/>
@@ -57,7 +57,7 @@
         <a:cs typeface="+mn-cs"/>
       </a:defRPr>
     </a:lvl4pPr>
-    <a:lvl5pPr marL="1828800" algn="l" defTabSz="914400" rtl="0" eaLnBrk="1" latinLnBrk="0" hangingPunct="1">
+    <a:lvl5pPr marL="1828800" algn="l" defTabSz="457200" rtl="0" eaLnBrk="1" latinLnBrk="0" hangingPunct="1">
       <a:defRPr sz="1800" kern="1200">
         <a:solidFill>
           <a:schemeClr val="tx1"/>
@@ -67,7 +67,7 @@
         <a:cs typeface="+mn-cs"/>
       </a:defRPr>
     </a:lvl5pPr>
-    <a:lvl6pPr marL="2286000" algn="l" defTabSz="914400" rtl="0" eaLnBrk="1" latinLnBrk="0" hangingPunct="1">
+    <a:lvl6pPr marL="2286000" algn="l" defTabSz="457200" rtl="0" eaLnBrk="1" latinLnBrk="0" hangingPunct="1">
       <a:defRPr sz="1800" kern="1200">
         <a:solidFill>
           <a:schemeClr val="tx1"/>
@@ -77,7 +77,7 @@
         <a:cs typeface="+mn-cs"/>
       </a:defRPr>
     </a:lvl6pPr>
-    <a:lvl7pPr marL="2743200" algn="l" defTabSz="914400" rtl="0" eaLnBrk="1" latinLnBrk="0" hangingPunct="1">
+    <a:lvl7pPr marL="2743200" algn="l" defTabSz="457200" rtl="0" eaLnBrk="1" latinLnBrk="0" hangingPunct="1">
       <a:defRPr sz="1800" kern="1200">
         <a:solidFill>
           <a:schemeClr val="tx1"/>
@@ -87,7 +87,7 @@
         <a:cs typeface="+mn-cs"/>
       </a:defRPr>
     </a:lvl7pPr>
-    <a:lvl8pPr marL="3200400" algn="l" defTabSz="914400" rtl="0" eaLnBrk="1" latinLnBrk="0" hangingPunct="1">
+    <a:lvl8pPr marL="3200400" algn="l" defTabSz="457200" rtl="0" eaLnBrk="1" latinLnBrk="0" hangingPunct="1">
       <a:defRPr sz="1800" kern="1200">
         <a:solidFill>
           <a:schemeClr val="tx1"/>
@@ -97,7 +97,7 @@
         <a:cs typeface="+mn-cs"/>
       </a:defRPr>
     </a:lvl8pPr>
-    <a:lvl9pPr marL="3657600" algn="l" defTabSz="914400" rtl="0" eaLnBrk="1" latinLnBrk="0" hangingPunct="1">
+    <a:lvl9pPr marL="3657600" algn="l" defTabSz="457200" rtl="0" eaLnBrk="1" latinLnBrk="0" hangingPunct="1">
       <a:defRPr sz="1800" kern="1200">
         <a:solidFill>
           <a:schemeClr val="tx1"/>
@@ -112,8 +112,18 @@
 </file>
 
 <file path=ppt/slideLayouts/slideLayout1.xml><?xml version="1.0" encoding="utf-8"?>
-<p:sldLayout xmlns:a="http://schemas.openxmlformats.org/drawingml/2006/main" xmlns:r="http://schemas.openxmlformats.org/officeDocument/2006/relationships" xmlns:p="http://schemas.openxmlformats.org/presentationml/2006/main" type="title" preserve="1">
+<p:sldLayout xmlns:a="http://schemas.openxmlformats.org/drawingml/2006/main" xmlns:r="http://schemas.openxmlformats.org/officeDocument/2006/relationships" xmlns:p="http://schemas.openxmlformats.org/presentationml/2006/main" showMasterSp="0" type="title" preserve="1">
   <p:cSld name="Title Slide">
+    <p:bg>
+      <p:bgPr>
+        <a:solidFill>
+          <a:schemeClr val="bg2">
+            <a:lumMod val="75000"/>
+          </a:schemeClr>
+        </a:solidFill>
+        <a:effectLst/>
+      </p:bgPr>
+    </p:bg>
     <p:spTree>
       <p:nvGrpSpPr>
         <p:cNvPr id="1" name=""/>
@@ -130,13 +140,7 @@
       </p:grpSpPr>
       <p:sp>
         <p:nvSpPr>
-          <p:cNvPr id="2" name="Title 1">
-            <a:extLst>
-              <a:ext uri="{FF2B5EF4-FFF2-40B4-BE49-F238E27FC236}">
-                <a16:creationId xmlns:a16="http://schemas.microsoft.com/office/drawing/2014/main" id="{CDFD72C1-609D-FCEE-B4B6-249E886B962C}"/>
-              </a:ext>
-            </a:extLst>
-          </p:cNvPr>
+          <p:cNvPr id="2" name="Title 1"/>
           <p:cNvSpPr>
             <a:spLocks noGrp="1"/>
           </p:cNvSpPr>
@@ -146,15 +150,24 @@
         </p:nvSpPr>
         <p:spPr>
           <a:xfrm>
-            <a:off x="1524000" y="1122363"/>
-            <a:ext cx="9144000" cy="2387600"/>
-          </a:xfrm>
-        </p:spPr>
-        <p:txBody>
-          <a:bodyPr anchor="b"/>
+            <a:off x="1261872" y="758952"/>
+            <a:ext cx="9418320" cy="4041648"/>
+          </a:xfrm>
+        </p:spPr>
+        <p:txBody>
+          <a:bodyPr anchor="b">
+            <a:normAutofit/>
+          </a:bodyPr>
           <a:lstStyle>
-            <a:lvl1pPr algn="ctr">
-              <a:defRPr sz="6000"/>
+            <a:lvl1pPr algn="l">
+              <a:lnSpc>
+                <a:spcPct val="85000"/>
+              </a:lnSpc>
+              <a:defRPr sz="7200" baseline="0">
+                <a:solidFill>
+                  <a:schemeClr val="tx1"/>
+                </a:solidFill>
+              </a:defRPr>
             </a:lvl1pPr>
           </a:lstStyle>
           <a:p>
@@ -162,18 +175,13 @@
               <a:rPr lang="en-US"/>
               <a:t>Click to edit Master title style</a:t>
             </a:r>
-          </a:p>
-        </p:txBody>
-      </p:sp>
-      <p:sp>
-        <p:nvSpPr>
-          <p:cNvPr id="3" name="Subtitle 2">
-            <a:extLst>
-              <a:ext uri="{FF2B5EF4-FFF2-40B4-BE49-F238E27FC236}">
-                <a16:creationId xmlns:a16="http://schemas.microsoft.com/office/drawing/2014/main" id="{335BF536-0607-51D9-5141-9FD2D7C20D84}"/>
-              </a:ext>
-            </a:extLst>
-          </p:cNvPr>
+            <a:endParaRPr lang="en-US" dirty="0"/>
+          </a:p>
+        </p:txBody>
+      </p:sp>
+      <p:sp>
+        <p:nvSpPr>
+          <p:cNvPr id="3" name="Subtitle 2"/>
           <p:cNvSpPr>
             <a:spLocks noGrp="1"/>
           </p:cNvSpPr>
@@ -183,78 +191,91 @@
         </p:nvSpPr>
         <p:spPr>
           <a:xfrm>
-            <a:off x="1524000" y="3602038"/>
-            <a:ext cx="9144000" cy="1655762"/>
-          </a:xfrm>
-        </p:spPr>
+            <a:off x="1261872" y="4800600"/>
+            <a:ext cx="9418320" cy="1691640"/>
+          </a:xfrm>
+        </p:spPr>
+        <p:txBody>
+          <a:bodyPr>
+            <a:normAutofit/>
+          </a:bodyPr>
+          <a:lstStyle>
+            <a:lvl1pPr marL="0" indent="0" algn="l">
+              <a:buNone/>
+              <a:defRPr sz="2200" baseline="0">
+                <a:solidFill>
+                  <a:schemeClr val="tx1">
+                    <a:lumMod val="75000"/>
+                  </a:schemeClr>
+                </a:solidFill>
+              </a:defRPr>
+            </a:lvl1pPr>
+            <a:lvl2pPr marL="457200" indent="0" algn="ctr">
+              <a:buNone/>
+              <a:defRPr sz="2200"/>
+            </a:lvl2pPr>
+            <a:lvl3pPr marL="914400" indent="0" algn="ctr">
+              <a:buNone/>
+              <a:defRPr sz="2200"/>
+            </a:lvl3pPr>
+            <a:lvl4pPr marL="1371600" indent="0" algn="ctr">
+              <a:buNone/>
+              <a:defRPr sz="2000"/>
+            </a:lvl4pPr>
+            <a:lvl5pPr marL="1828800" indent="0" algn="ctr">
+              <a:buNone/>
+              <a:defRPr sz="2000"/>
+            </a:lvl5pPr>
+            <a:lvl6pPr marL="2286000" indent="0" algn="ctr">
+              <a:buNone/>
+              <a:defRPr sz="2000"/>
+            </a:lvl6pPr>
+            <a:lvl7pPr marL="2743200" indent="0" algn="ctr">
+              <a:buNone/>
+              <a:defRPr sz="2000"/>
+            </a:lvl7pPr>
+            <a:lvl8pPr marL="3200400" indent="0" algn="ctr">
+              <a:buNone/>
+              <a:defRPr sz="2000"/>
+            </a:lvl8pPr>
+            <a:lvl9pPr marL="3657600" indent="0" algn="ctr">
+              <a:buNone/>
+              <a:defRPr sz="2000"/>
+            </a:lvl9pPr>
+          </a:lstStyle>
+          <a:p>
+            <a:r>
+              <a:rPr lang="en-US"/>
+              <a:t>Click to edit Master subtitle style</a:t>
+            </a:r>
+            <a:endParaRPr lang="en-US" dirty="0"/>
+          </a:p>
+        </p:txBody>
+      </p:sp>
+      <p:sp>
+        <p:nvSpPr>
+          <p:cNvPr id="4" name="Date Placeholder 3"/>
+          <p:cNvSpPr>
+            <a:spLocks noGrp="1"/>
+          </p:cNvSpPr>
+          <p:nvPr>
+            <p:ph type="dt" sz="half" idx="10"/>
+          </p:nvPr>
+        </p:nvSpPr>
+        <p:spPr/>
         <p:txBody>
           <a:bodyPr/>
           <a:lstStyle>
-            <a:lvl1pPr marL="0" indent="0" algn="ctr">
-              <a:buNone/>
-              <a:defRPr sz="2400"/>
+            <a:lvl1pPr>
+              <a:defRPr>
+                <a:solidFill>
+                  <a:schemeClr val="tx1">
+                    <a:lumMod val="50000"/>
+                  </a:schemeClr>
+                </a:solidFill>
+              </a:defRPr>
             </a:lvl1pPr>
-            <a:lvl2pPr marL="457200" indent="0" algn="ctr">
-              <a:buNone/>
-              <a:defRPr sz="2000"/>
-            </a:lvl2pPr>
-            <a:lvl3pPr marL="914400" indent="0" algn="ctr">
-              <a:buNone/>
-              <a:defRPr sz="1800"/>
-            </a:lvl3pPr>
-            <a:lvl4pPr marL="1371600" indent="0" algn="ctr">
-              <a:buNone/>
-              <a:defRPr sz="1600"/>
-            </a:lvl4pPr>
-            <a:lvl5pPr marL="1828800" indent="0" algn="ctr">
-              <a:buNone/>
-              <a:defRPr sz="1600"/>
-            </a:lvl5pPr>
-            <a:lvl6pPr marL="2286000" indent="0" algn="ctr">
-              <a:buNone/>
-              <a:defRPr sz="1600"/>
-            </a:lvl6pPr>
-            <a:lvl7pPr marL="2743200" indent="0" algn="ctr">
-              <a:buNone/>
-              <a:defRPr sz="1600"/>
-            </a:lvl7pPr>
-            <a:lvl8pPr marL="3200400" indent="0" algn="ctr">
-              <a:buNone/>
-              <a:defRPr sz="1600"/>
-            </a:lvl8pPr>
-            <a:lvl9pPr marL="3657600" indent="0" algn="ctr">
-              <a:buNone/>
-              <a:defRPr sz="1600"/>
-            </a:lvl9pPr>
           </a:lstStyle>
-          <a:p>
-            <a:r>
-              <a:rPr lang="en-US"/>
-              <a:t>Click to edit Master subtitle style</a:t>
-            </a:r>
-          </a:p>
-        </p:txBody>
-      </p:sp>
-      <p:sp>
-        <p:nvSpPr>
-          <p:cNvPr id="4" name="Date Placeholder 3">
-            <a:extLst>
-              <a:ext uri="{FF2B5EF4-FFF2-40B4-BE49-F238E27FC236}">
-                <a16:creationId xmlns:a16="http://schemas.microsoft.com/office/drawing/2014/main" id="{729677FC-2CE6-24ED-CCF1-54D24459959A}"/>
-              </a:ext>
-            </a:extLst>
-          </p:cNvPr>
-          <p:cNvSpPr>
-            <a:spLocks noGrp="1"/>
-          </p:cNvSpPr>
-          <p:nvPr>
-            <p:ph type="dt" sz="half" idx="10"/>
-          </p:nvPr>
-        </p:nvSpPr>
-        <p:spPr/>
-        <p:txBody>
-          <a:bodyPr/>
-          <a:lstStyle/>
           <a:p>
             <a:fld id="{A40CEE88-399A-427C-A403-7BA02A4F5B6A}" type="datetimeFigureOut">
               <a:rPr lang="en-US" smtClean="0"/>
@@ -266,13 +287,7 @@
       </p:sp>
       <p:sp>
         <p:nvSpPr>
-          <p:cNvPr id="5" name="Footer Placeholder 4">
-            <a:extLst>
-              <a:ext uri="{FF2B5EF4-FFF2-40B4-BE49-F238E27FC236}">
-                <a16:creationId xmlns:a16="http://schemas.microsoft.com/office/drawing/2014/main" id="{3D426214-EC53-F9DE-5120-244169EDBCDE}"/>
-              </a:ext>
-            </a:extLst>
-          </p:cNvPr>
+          <p:cNvPr id="5" name="Footer Placeholder 4"/>
           <p:cNvSpPr>
             <a:spLocks noGrp="1"/>
           </p:cNvSpPr>
@@ -283,7 +298,17 @@
         <p:spPr/>
         <p:txBody>
           <a:bodyPr/>
-          <a:lstStyle/>
+          <a:lstStyle>
+            <a:lvl1pPr>
+              <a:defRPr>
+                <a:solidFill>
+                  <a:schemeClr val="tx1">
+                    <a:lumMod val="65000"/>
+                  </a:schemeClr>
+                </a:solidFill>
+              </a:defRPr>
+            </a:lvl1pPr>
+          </a:lstStyle>
           <a:p>
             <a:endParaRPr lang="en-US"/>
           </a:p>
@@ -291,13 +316,7 @@
       </p:sp>
       <p:sp>
         <p:nvSpPr>
-          <p:cNvPr id="6" name="Slide Number Placeholder 5">
-            <a:extLst>
-              <a:ext uri="{FF2B5EF4-FFF2-40B4-BE49-F238E27FC236}">
-                <a16:creationId xmlns:a16="http://schemas.microsoft.com/office/drawing/2014/main" id="{8C8FC227-F50B-5716-A532-2B3CDC0352B8}"/>
-              </a:ext>
-            </a:extLst>
-          </p:cNvPr>
+          <p:cNvPr id="6" name="Slide Number Placeholder 5"/>
           <p:cNvSpPr>
             <a:spLocks noGrp="1"/>
           </p:cNvSpPr>
@@ -308,7 +327,17 @@
         <p:spPr/>
         <p:txBody>
           <a:bodyPr/>
-          <a:lstStyle/>
+          <a:lstStyle>
+            <a:lvl1pPr>
+              <a:defRPr>
+                <a:solidFill>
+                  <a:schemeClr val="tx1">
+                    <a:lumMod val="65000"/>
+                  </a:schemeClr>
+                </a:solidFill>
+              </a:defRPr>
+            </a:lvl1pPr>
+          </a:lstStyle>
           <a:p>
             <a:fld id="{C6E6355F-1A74-4BA4-A144-E70F8AAC7835}" type="slidenum">
               <a:rPr lang="en-US" smtClean="0"/>
@@ -318,15 +347,53 @@
           </a:p>
         </p:txBody>
       </p:sp>
+      <p:sp>
+        <p:nvSpPr>
+          <p:cNvPr id="7" name="Rectangle 6"/>
+          <p:cNvSpPr/>
+          <p:nvPr/>
+        </p:nvSpPr>
+        <p:spPr>
+          <a:xfrm>
+            <a:off x="0" y="0"/>
+            <a:ext cx="457200" cy="6858000"/>
+          </a:xfrm>
+          <a:prstGeom prst="rect">
+            <a:avLst/>
+          </a:prstGeom>
+          <a:solidFill>
+            <a:schemeClr val="accent1"/>
+          </a:solidFill>
+          <a:ln>
+            <a:noFill/>
+          </a:ln>
+        </p:spPr>
+        <p:style>
+          <a:lnRef idx="2">
+            <a:schemeClr val="accent1">
+              <a:shade val="50000"/>
+            </a:schemeClr>
+          </a:lnRef>
+          <a:fillRef idx="1">
+            <a:schemeClr val="accent1"/>
+          </a:fillRef>
+          <a:effectRef idx="0">
+            <a:schemeClr val="accent1"/>
+          </a:effectRef>
+          <a:fontRef idx="minor">
+            <a:schemeClr val="lt1"/>
+          </a:fontRef>
+        </p:style>
+      </p:sp>
     </p:spTree>
     <p:extLst>
       <p:ext uri="{BB962C8B-B14F-4D97-AF65-F5344CB8AC3E}">
-        <p14:creationId xmlns:p14="http://schemas.microsoft.com/office/powerpoint/2010/main" val="53223443"/>
+        <p14:creationId xmlns:p14="http://schemas.microsoft.com/office/powerpoint/2010/main" val="2949776469"/>
       </p:ext>
     </p:extLst>
   </p:cSld>
   <p:clrMapOvr>
-    <a:masterClrMapping/>
+    <a:overrideClrMapping bg1="dk1" tx1="lt1" bg2="dk2" tx2="lt2" accent1="accent1" accent2="accent2" accent3="accent3" accent4="accent4" accent5="accent5" accent6="accent6" hlink="hlink" folHlink="folHlink"/>
   </p:clrMapOvr>
 </p:sldLayout>
 </file>
@@ -350,13 +417,7 @@
       </p:grpSpPr>
       <p:sp>
         <p:nvSpPr>
-          <p:cNvPr id="2" name="Title 1">
-            <a:extLst>
-              <a:ext uri="{FF2B5EF4-FFF2-40B4-BE49-F238E27FC236}">
-                <a16:creationId xmlns:a16="http://schemas.microsoft.com/office/drawing/2014/main" id="{09D9B6C0-EFDA-27A7-086F-AEFE03C12109}"/>
-              </a:ext>
-            </a:extLst>
-          </p:cNvPr>
+          <p:cNvPr id="2" name="Title 1"/>
           <p:cNvSpPr>
             <a:spLocks noGrp="1"/>
           </p:cNvSpPr>
@@ -373,18 +434,13 @@
               <a:rPr lang="en-US"/>
               <a:t>Click to edit Master title style</a:t>
             </a:r>
-          </a:p>
-        </p:txBody>
-      </p:sp>
-      <p:sp>
-        <p:nvSpPr>
-          <p:cNvPr id="3" name="Vertical Text Placeholder 2">
-            <a:extLst>
-              <a:ext uri="{FF2B5EF4-FFF2-40B4-BE49-F238E27FC236}">
-                <a16:creationId xmlns:a16="http://schemas.microsoft.com/office/drawing/2014/main" id="{574FE226-82D5-FBA3-1A61-0BA1011D5526}"/>
-              </a:ext>
-            </a:extLst>
-          </p:cNvPr>
+            <a:endParaRPr lang="en-US" dirty="0"/>
+          </a:p>
+        </p:txBody>
+      </p:sp>
+      <p:sp>
+        <p:nvSpPr>
+          <p:cNvPr id="3" name="Vertical Text Placeholder 2"/>
           <p:cNvSpPr>
             <a:spLocks noGrp="1"/>
           </p:cNvSpPr>
@@ -430,18 +486,13 @@
               <a:rPr lang="en-US"/>
               <a:t>Fifth level</a:t>
             </a:r>
-          </a:p>
-        </p:txBody>
-      </p:sp>
-      <p:sp>
-        <p:nvSpPr>
-          <p:cNvPr id="4" name="Date Placeholder 3">
-            <a:extLst>
-              <a:ext uri="{FF2B5EF4-FFF2-40B4-BE49-F238E27FC236}">
-                <a16:creationId xmlns:a16="http://schemas.microsoft.com/office/drawing/2014/main" id="{ADE25EF4-7A65-2BBF-1A14-9268B01DB9DA}"/>
-              </a:ext>
-            </a:extLst>
-          </p:cNvPr>
+            <a:endParaRPr lang="en-US" dirty="0"/>
+          </a:p>
+        </p:txBody>
+      </p:sp>
+      <p:sp>
+        <p:nvSpPr>
+          <p:cNvPr id="4" name="Date Placeholder 3"/>
           <p:cNvSpPr>
             <a:spLocks noGrp="1"/>
           </p:cNvSpPr>
@@ -464,13 +515,7 @@
       </p:sp>
       <p:sp>
         <p:nvSpPr>
-          <p:cNvPr id="5" name="Footer Placeholder 4">
-            <a:extLst>
-              <a:ext uri="{FF2B5EF4-FFF2-40B4-BE49-F238E27FC236}">
-                <a16:creationId xmlns:a16="http://schemas.microsoft.com/office/drawing/2014/main" id="{1CCE9D43-91E5-DFC5-91FF-331B6AD444C5}"/>
-              </a:ext>
-            </a:extLst>
-          </p:cNvPr>
+          <p:cNvPr id="5" name="Footer Placeholder 4"/>
           <p:cNvSpPr>
             <a:spLocks noGrp="1"/>
           </p:cNvSpPr>
@@ -489,13 +534,7 @@
       </p:sp>
       <p:sp>
         <p:nvSpPr>
-          <p:cNvPr id="6" name="Slide Number Placeholder 5">
-            <a:extLst>
-              <a:ext uri="{FF2B5EF4-FFF2-40B4-BE49-F238E27FC236}">
-                <a16:creationId xmlns:a16="http://schemas.microsoft.com/office/drawing/2014/main" id="{0CA8E380-C503-23B3-31DB-4A40E87269BD}"/>
-              </a:ext>
-            </a:extLst>
-          </p:cNvPr>
+          <p:cNvPr id="6" name="Slide Number Placeholder 5"/>
           <p:cNvSpPr>
             <a:spLocks noGrp="1"/>
           </p:cNvSpPr>
@@ -519,7 +558,7 @@
     </p:spTree>
     <p:extLst>
       <p:ext uri="{BB962C8B-B14F-4D97-AF65-F5344CB8AC3E}">
-        <p14:creationId xmlns:p14="http://schemas.microsoft.com/office/powerpoint/2010/main" val="3700964787"/>
+        <p14:creationId xmlns:p14="http://schemas.microsoft.com/office/powerpoint/2010/main" val="325925755"/>
       </p:ext>
     </p:extLst>
   </p:cSld>
@@ -548,13 +587,7 @@
       </p:grpSpPr>
       <p:sp>
         <p:nvSpPr>
-          <p:cNvPr id="2" name="Vertical Title 1">
-            <a:extLst>
-              <a:ext uri="{FF2B5EF4-FFF2-40B4-BE49-F238E27FC236}">
-                <a16:creationId xmlns:a16="http://schemas.microsoft.com/office/drawing/2014/main" id="{E16B4964-7019-FE48-1B8F-AD2EC5CFDE30}"/>
-              </a:ext>
-            </a:extLst>
-          </p:cNvPr>
+          <p:cNvPr id="2" name="Vertical Title 1"/>
           <p:cNvSpPr>
             <a:spLocks noGrp="1"/>
           </p:cNvSpPr>
@@ -564,8 +597,8 @@
         </p:nvSpPr>
         <p:spPr>
           <a:xfrm>
-            <a:off x="8724900" y="365125"/>
-            <a:ext cx="2628900" cy="5811838"/>
+            <a:off x="8648700" y="381000"/>
+            <a:ext cx="2476500" cy="5897562"/>
           </a:xfrm>
         </p:spPr>
         <p:txBody>
@@ -576,18 +609,13 @@
               <a:rPr lang="en-US"/>
               <a:t>Click to edit Master title style</a:t>
             </a:r>
-          </a:p>
-        </p:txBody>
-      </p:sp>
-      <p:sp>
-        <p:nvSpPr>
-          <p:cNvPr id="3" name="Vertical Text Placeholder 2">
-            <a:extLst>
-              <a:ext uri="{FF2B5EF4-FFF2-40B4-BE49-F238E27FC236}">
-                <a16:creationId xmlns:a16="http://schemas.microsoft.com/office/drawing/2014/main" id="{8E2FE896-7502-ECA1-26F0-73AEDDCDAF63}"/>
-              </a:ext>
-            </a:extLst>
-          </p:cNvPr>
+            <a:endParaRPr lang="en-US" dirty="0"/>
+          </a:p>
+        </p:txBody>
+      </p:sp>
+      <p:sp>
+        <p:nvSpPr>
+          <p:cNvPr id="3" name="Vertical Text Placeholder 2"/>
           <p:cNvSpPr>
             <a:spLocks noGrp="1"/>
           </p:cNvSpPr>
@@ -597,8 +625,8 @@
         </p:nvSpPr>
         <p:spPr>
           <a:xfrm>
-            <a:off x="838200" y="365125"/>
-            <a:ext cx="7734300" cy="5811838"/>
+            <a:off x="762000" y="381000"/>
+            <a:ext cx="7734300" cy="5897562"/>
           </a:xfrm>
         </p:spPr>
         <p:txBody>
@@ -638,18 +666,13 @@
               <a:rPr lang="en-US"/>
               <a:t>Fifth level</a:t>
             </a:r>
-          </a:p>
-        </p:txBody>
-      </p:sp>
-      <p:sp>
-        <p:nvSpPr>
-          <p:cNvPr id="4" name="Date Placeholder 3">
-            <a:extLst>
-              <a:ext uri="{FF2B5EF4-FFF2-40B4-BE49-F238E27FC236}">
-                <a16:creationId xmlns:a16="http://schemas.microsoft.com/office/drawing/2014/main" id="{09DE0D2D-E59A-B683-73D6-4ED0EB77A5C1}"/>
-              </a:ext>
-            </a:extLst>
-          </p:cNvPr>
+            <a:endParaRPr lang="en-US" dirty="0"/>
+          </a:p>
+        </p:txBody>
+      </p:sp>
+      <p:sp>
+        <p:nvSpPr>
+          <p:cNvPr id="4" name="Date Placeholder 3"/>
           <p:cNvSpPr>
             <a:spLocks noGrp="1"/>
           </p:cNvSpPr>
@@ -672,13 +695,7 @@
       </p:sp>
       <p:sp>
         <p:nvSpPr>
-          <p:cNvPr id="5" name="Footer Placeholder 4">
-            <a:extLst>
-              <a:ext uri="{FF2B5EF4-FFF2-40B4-BE49-F238E27FC236}">
-                <a16:creationId xmlns:a16="http://schemas.microsoft.com/office/drawing/2014/main" id="{B1283342-B65D-4227-D054-C1EB263554F6}"/>
-              </a:ext>
-            </a:extLst>
-          </p:cNvPr>
+          <p:cNvPr id="5" name="Footer Placeholder 4"/>
           <p:cNvSpPr>
             <a:spLocks noGrp="1"/>
           </p:cNvSpPr>
@@ -697,13 +714,7 @@
       </p:sp>
       <p:sp>
         <p:nvSpPr>
-          <p:cNvPr id="6" name="Slide Number Placeholder 5">
-            <a:extLst>
-              <a:ext uri="{FF2B5EF4-FFF2-40B4-BE49-F238E27FC236}">
-                <a16:creationId xmlns:a16="http://schemas.microsoft.com/office/drawing/2014/main" id="{184776C2-D632-BC10-A315-45D2125BA8D1}"/>
-              </a:ext>
-            </a:extLst>
-          </p:cNvPr>
+          <p:cNvPr id="6" name="Slide Number Placeholder 5"/>
           <p:cNvSpPr>
             <a:spLocks noGrp="1"/>
           </p:cNvSpPr>
@@ -727,7 +738,7 @@
     </p:spTree>
     <p:extLst>
       <p:ext uri="{BB962C8B-B14F-4D97-AF65-F5344CB8AC3E}">
-        <p14:creationId xmlns:p14="http://schemas.microsoft.com/office/powerpoint/2010/main" val="3964390710"/>
+        <p14:creationId xmlns:p14="http://schemas.microsoft.com/office/powerpoint/2010/main" val="2120945128"/>
       </p:ext>
     </p:extLst>
   </p:cSld>
@@ -756,13 +767,7 @@
       </p:grpSpPr>
       <p:sp>
         <p:nvSpPr>
-          <p:cNvPr id="2" name="Title 1">
-            <a:extLst>
-              <a:ext uri="{FF2B5EF4-FFF2-40B4-BE49-F238E27FC236}">
-                <a16:creationId xmlns:a16="http://schemas.microsoft.com/office/drawing/2014/main" id="{407314C8-A892-1C13-9977-2F48CE595E01}"/>
-              </a:ext>
-            </a:extLst>
-          </p:cNvPr>
+          <p:cNvPr id="2" name="Title 1"/>
           <p:cNvSpPr>
             <a:spLocks noGrp="1"/>
           </p:cNvSpPr>
@@ -779,18 +784,13 @@
               <a:rPr lang="en-US"/>
               <a:t>Click to edit Master title style</a:t>
             </a:r>
-          </a:p>
-        </p:txBody>
-      </p:sp>
-      <p:sp>
-        <p:nvSpPr>
-          <p:cNvPr id="3" name="Content Placeholder 2">
-            <a:extLst>
-              <a:ext uri="{FF2B5EF4-FFF2-40B4-BE49-F238E27FC236}">
-                <a16:creationId xmlns:a16="http://schemas.microsoft.com/office/drawing/2014/main" id="{282292AB-53EC-BB47-F3E7-A6170316CE40}"/>
-              </a:ext>
-            </a:extLst>
-          </p:cNvPr>
+            <a:endParaRPr lang="en-US" dirty="0"/>
+          </a:p>
+        </p:txBody>
+      </p:sp>
+      <p:sp>
+        <p:nvSpPr>
+          <p:cNvPr id="3" name="Content Placeholder 2"/>
           <p:cNvSpPr>
             <a:spLocks noGrp="1"/>
           </p:cNvSpPr>
@@ -836,18 +836,13 @@
               <a:rPr lang="en-US"/>
               <a:t>Fifth level</a:t>
             </a:r>
-          </a:p>
-        </p:txBody>
-      </p:sp>
-      <p:sp>
-        <p:nvSpPr>
-          <p:cNvPr id="4" name="Date Placeholder 3">
-            <a:extLst>
-              <a:ext uri="{FF2B5EF4-FFF2-40B4-BE49-F238E27FC236}">
-                <a16:creationId xmlns:a16="http://schemas.microsoft.com/office/drawing/2014/main" id="{0445D3ED-BEAD-1D59-75E9-6AB650F45A75}"/>
-              </a:ext>
-            </a:extLst>
-          </p:cNvPr>
+            <a:endParaRPr lang="en-US" dirty="0"/>
+          </a:p>
+        </p:txBody>
+      </p:sp>
+      <p:sp>
+        <p:nvSpPr>
+          <p:cNvPr id="4" name="Date Placeholder 3"/>
           <p:cNvSpPr>
             <a:spLocks noGrp="1"/>
           </p:cNvSpPr>
@@ -870,13 +865,7 @@
       </p:sp>
       <p:sp>
         <p:nvSpPr>
-          <p:cNvPr id="5" name="Footer Placeholder 4">
-            <a:extLst>
-              <a:ext uri="{FF2B5EF4-FFF2-40B4-BE49-F238E27FC236}">
-                <a16:creationId xmlns:a16="http://schemas.microsoft.com/office/drawing/2014/main" id="{56322395-4E3C-A09C-DDBF-A6D56B371717}"/>
-              </a:ext>
-            </a:extLst>
-          </p:cNvPr>
+          <p:cNvPr id="5" name="Footer Placeholder 4"/>
           <p:cNvSpPr>
             <a:spLocks noGrp="1"/>
           </p:cNvSpPr>
@@ -895,13 +884,7 @@
       </p:sp>
       <p:sp>
         <p:nvSpPr>
-          <p:cNvPr id="6" name="Slide Number Placeholder 5">
-            <a:extLst>
-              <a:ext uri="{FF2B5EF4-FFF2-40B4-BE49-F238E27FC236}">
-                <a16:creationId xmlns:a16="http://schemas.microsoft.com/office/drawing/2014/main" id="{7297D081-87E6-4276-1971-17649410893B}"/>
-              </a:ext>
-            </a:extLst>
-          </p:cNvPr>
+          <p:cNvPr id="6" name="Slide Number Placeholder 5"/>
           <p:cNvSpPr>
             <a:spLocks noGrp="1"/>
           </p:cNvSpPr>
@@ -925,7 +908,7 @@
     </p:spTree>
     <p:extLst>
       <p:ext uri="{BB962C8B-B14F-4D97-AF65-F5344CB8AC3E}">
-        <p14:creationId xmlns:p14="http://schemas.microsoft.com/office/powerpoint/2010/main" val="3370915972"/>
+        <p14:creationId xmlns:p14="http://schemas.microsoft.com/office/powerpoint/2010/main" val="4272368648"/>
       </p:ext>
     </p:extLst>
   </p:cSld>
@@ -954,13 +937,7 @@
       </p:grpSpPr>
       <p:sp>
         <p:nvSpPr>
-          <p:cNvPr id="2" name="Title 1">
-            <a:extLst>
-              <a:ext uri="{FF2B5EF4-FFF2-40B4-BE49-F238E27FC236}">
-                <a16:creationId xmlns:a16="http://schemas.microsoft.com/office/drawing/2014/main" id="{1365BBD6-50C4-5CCC-1936-1490C7B61194}"/>
-              </a:ext>
-            </a:extLst>
-          </p:cNvPr>
+          <p:cNvPr id="2" name="Title 1"/>
           <p:cNvSpPr>
             <a:spLocks noGrp="1"/>
           </p:cNvSpPr>
@@ -970,15 +947,20 @@
         </p:nvSpPr>
         <p:spPr>
           <a:xfrm>
-            <a:off x="831850" y="1709738"/>
-            <a:ext cx="10515600" cy="2852737"/>
-          </a:xfrm>
-        </p:spPr>
-        <p:txBody>
-          <a:bodyPr anchor="b"/>
+            <a:off x="1261872" y="758952"/>
+            <a:ext cx="9418320" cy="4041648"/>
+          </a:xfrm>
+        </p:spPr>
+        <p:txBody>
+          <a:bodyPr anchor="b">
+            <a:normAutofit/>
+          </a:bodyPr>
           <a:lstStyle>
             <a:lvl1pPr>
-              <a:defRPr sz="6000"/>
+              <a:lnSpc>
+                <a:spcPct val="85000"/>
+              </a:lnSpc>
+              <a:defRPr sz="7200" b="0"/>
             </a:lvl1pPr>
           </a:lstStyle>
           <a:p>
@@ -986,18 +968,13 @@
               <a:rPr lang="en-US"/>
               <a:t>Click to edit Master title style</a:t>
             </a:r>
-          </a:p>
-        </p:txBody>
-      </p:sp>
-      <p:sp>
-        <p:nvSpPr>
-          <p:cNvPr id="3" name="Text Placeholder 2">
-            <a:extLst>
-              <a:ext uri="{FF2B5EF4-FFF2-40B4-BE49-F238E27FC236}">
-                <a16:creationId xmlns:a16="http://schemas.microsoft.com/office/drawing/2014/main" id="{20566DE1-BA6B-23BA-4358-0D09FB14A2AD}"/>
-              </a:ext>
-            </a:extLst>
-          </p:cNvPr>
+            <a:endParaRPr lang="en-US" dirty="0"/>
+          </a:p>
+        </p:txBody>
+      </p:sp>
+      <p:sp>
+        <p:nvSpPr>
+          <p:cNvPr id="3" name="Text Placeholder 2"/>
           <p:cNvSpPr>
             <a:spLocks noGrp="1"/>
           </p:cNvSpPr>
@@ -1007,99 +984,102 @@
         </p:nvSpPr>
         <p:spPr>
           <a:xfrm>
-            <a:off x="831850" y="4589463"/>
-            <a:ext cx="10515600" cy="1500187"/>
-          </a:xfrm>
-        </p:spPr>
-        <p:txBody>
-          <a:bodyPr/>
+            <a:off x="1261872" y="4800600"/>
+            <a:ext cx="9418320" cy="1691640"/>
+          </a:xfrm>
+        </p:spPr>
+        <p:txBody>
+          <a:bodyPr anchor="t">
+            <a:normAutofit/>
+          </a:bodyPr>
           <a:lstStyle>
             <a:lvl1pPr marL="0" indent="0">
               <a:buNone/>
-              <a:defRPr sz="2400">
+              <a:defRPr sz="2200">
                 <a:solidFill>
                   <a:schemeClr val="tx1">
-                    <a:tint val="82000"/>
+                    <a:lumMod val="65000"/>
+                    <a:lumOff val="35000"/>
                   </a:schemeClr>
                 </a:solidFill>
               </a:defRPr>
             </a:lvl1pPr>
             <a:lvl2pPr marL="457200" indent="0">
               <a:buNone/>
-              <a:defRPr sz="2000">
+              <a:defRPr sz="1800">
                 <a:solidFill>
                   <a:schemeClr val="tx1">
-                    <a:tint val="82000"/>
+                    <a:tint val="75000"/>
                   </a:schemeClr>
                 </a:solidFill>
               </a:defRPr>
             </a:lvl2pPr>
             <a:lvl3pPr marL="914400" indent="0">
               <a:buNone/>
-              <a:defRPr sz="1800">
+              <a:defRPr sz="1600">
                 <a:solidFill>
                   <a:schemeClr val="tx1">
-                    <a:tint val="82000"/>
+                    <a:tint val="75000"/>
                   </a:schemeClr>
                 </a:solidFill>
               </a:defRPr>
             </a:lvl3pPr>
             <a:lvl4pPr marL="1371600" indent="0">
               <a:buNone/>
-              <a:defRPr sz="1600">
+              <a:defRPr sz="1400">
                 <a:solidFill>
                   <a:schemeClr val="tx1">
-                    <a:tint val="82000"/>
+                    <a:tint val="75000"/>
                   </a:schemeClr>
                 </a:solidFill>
               </a:defRPr>
             </a:lvl4pPr>
             <a:lvl5pPr marL="1828800" indent="0">
               <a:buNone/>
-              <a:defRPr sz="1600">
+              <a:defRPr sz="1400">
                 <a:solidFill>
                   <a:schemeClr val="tx1">
-                    <a:tint val="82000"/>
+                    <a:tint val="75000"/>
                   </a:schemeClr>
                 </a:solidFill>
               </a:defRPr>
             </a:lvl5pPr>
             <a:lvl6pPr marL="2286000" indent="0">
               <a:buNone/>
-              <a:defRPr sz="1600">
+              <a:defRPr sz="1400">
                 <a:solidFill>
                   <a:schemeClr val="tx1">
-                    <a:tint val="82000"/>
+                    <a:tint val="75000"/>
                   </a:schemeClr>
                 </a:solidFill>
               </a:defRPr>
             </a:lvl6pPr>
             <a:lvl7pPr marL="2743200" indent="0">
               <a:buNone/>
-              <a:defRPr sz="1600">
+              <a:defRPr sz="1400">
                 <a:solidFill>
                   <a:schemeClr val="tx1">
-                    <a:tint val="82000"/>
+                    <a:tint val="75000"/>
                   </a:schemeClr>
                 </a:solidFill>
               </a:defRPr>
             </a:lvl7pPr>
             <a:lvl8pPr marL="3200400" indent="0">
               <a:buNone/>
-              <a:defRPr sz="1600">
+              <a:defRPr sz="1400">
                 <a:solidFill>
                   <a:schemeClr val="tx1">
-                    <a:tint val="82000"/>
+                    <a:tint val="75000"/>
                   </a:schemeClr>
                 </a:solidFill>
               </a:defRPr>
             </a:lvl8pPr>
             <a:lvl9pPr marL="3657600" indent="0">
               <a:buNone/>
-              <a:defRPr sz="1600">
+              <a:defRPr sz="1400">
                 <a:solidFill>
                   <a:schemeClr val="tx1">
-                    <a:tint val="82000"/>
+                    <a:tint val="75000"/>
                   </a:schemeClr>
                 </a:solidFill>
               </a:defRPr>
@@ -1116,13 +1096,7 @@
       </p:sp>
       <p:sp>
         <p:nvSpPr>
-          <p:cNvPr id="4" name="Date Placeholder 3">
-            <a:extLst>
-              <a:ext uri="{FF2B5EF4-FFF2-40B4-BE49-F238E27FC236}">
-                <a16:creationId xmlns:a16="http://schemas.microsoft.com/office/drawing/2014/main" id="{95A8BAAC-1E26-0080-5E67-70D1275786EF}"/>
-              </a:ext>
-            </a:extLst>
-          </p:cNvPr>
+          <p:cNvPr id="4" name="Date Placeholder 3"/>
           <p:cNvSpPr>
             <a:spLocks noGrp="1"/>
           </p:cNvSpPr>
@@ -1145,13 +1119,7 @@
       </p:sp>
       <p:sp>
         <p:nvSpPr>
-          <p:cNvPr id="5" name="Footer Placeholder 4">
-            <a:extLst>
-              <a:ext uri="{FF2B5EF4-FFF2-40B4-BE49-F238E27FC236}">
-                <a16:creationId xmlns:a16="http://schemas.microsoft.com/office/drawing/2014/main" id="{07849076-044A-1016-2D79-A5F9DF4B6732}"/>
-              </a:ext>
-            </a:extLst>
-          </p:cNvPr>
+          <p:cNvPr id="5" name="Footer Placeholder 4"/>
           <p:cNvSpPr>
             <a:spLocks noGrp="1"/>
           </p:cNvSpPr>
@@ -1170,13 +1138,7 @@
       </p:sp>
       <p:sp>
         <p:nvSpPr>
-          <p:cNvPr id="6" name="Slide Number Placeholder 5">
-            <a:extLst>
-              <a:ext uri="{FF2B5EF4-FFF2-40B4-BE49-F238E27FC236}">
-                <a16:creationId xmlns:a16="http://schemas.microsoft.com/office/drawing/2014/main" id="{1FBD6C0D-E590-AD6E-DF20-C66663E5F12B}"/>
-              </a:ext>
-            </a:extLst>
-          </p:cNvPr>
+          <p:cNvPr id="6" name="Slide Number Placeholder 5"/>
           <p:cNvSpPr>
             <a:spLocks noGrp="1"/>
           </p:cNvSpPr>
@@ -1197,10 +1159,48 @@
           </a:p>
         </p:txBody>
       </p:sp>
+      <p:sp>
+        <p:nvSpPr>
+          <p:cNvPr id="7" name="Rectangle 6"/>
+          <p:cNvSpPr/>
+          <p:nvPr/>
+        </p:nvSpPr>
+        <p:spPr>
+          <a:xfrm>
+            <a:off x="0" y="0"/>
+            <a:ext cx="457200" cy="6858000"/>
+          </a:xfrm>
+          <a:prstGeom prst="rect">
+            <a:avLst/>
+          </a:prstGeom>
+          <a:solidFill>
+            <a:schemeClr val="accent1"/>
+          </a:solidFill>
+          <a:ln>
+            <a:noFill/>
+          </a:ln>
+        </p:spPr>
+        <p:style>
+          <a:lnRef idx="2">
+            <a:schemeClr val="accent1">
+              <a:shade val="50000"/>
+            </a:schemeClr>
+          </a:lnRef>
+          <a:fillRef idx="1">
+            <a:schemeClr val="accent1"/>
+          </a:fillRef>
+          <a:effectRef idx="0">
+            <a:schemeClr val="accent1"/>
+          </a:effectRef>
+          <a:fontRef idx="minor">
+            <a:schemeClr val="lt1"/>
+          </a:fontRef>
+        </p:style>
+      </p:sp>
     </p:spTree>
     <p:extLst>
       <p:ext uri="{BB962C8B-B14F-4D97-AF65-F5344CB8AC3E}">
-        <p14:creationId xmlns:p14="http://schemas.microsoft.com/office/powerpoint/2010/main" val="2109033409"/>
+        <p14:creationId xmlns:p14="http://schemas.microsoft.com/office/powerpoint/2010/main" val="2899868554"/>
       </p:ext>
     </p:extLst>
   </p:cSld>
@@ -1229,13 +1229,7 @@
       </p:grpSpPr>
       <p:sp>
         <p:nvSpPr>
-          <p:cNvPr id="2" name="Title 1">
-            <a:extLst>
-              <a:ext uri="{FF2B5EF4-FFF2-40B4-BE49-F238E27FC236}">
-                <a16:creationId xmlns:a16="http://schemas.microsoft.com/office/drawing/2014/main" id="{B789B69B-D45C-A72E-EA65-5056DAEBD3C6}"/>
-              </a:ext>
-            </a:extLst>
-          </p:cNvPr>
+          <p:cNvPr id="2" name="Title 1"/>
           <p:cNvSpPr>
             <a:spLocks noGrp="1"/>
           </p:cNvSpPr>
@@ -1252,18 +1246,13 @@
               <a:rPr lang="en-US"/>
               <a:t>Click to edit Master title style</a:t>
             </a:r>
-          </a:p>
-        </p:txBody>
-      </p:sp>
-      <p:sp>
-        <p:nvSpPr>
-          <p:cNvPr id="3" name="Content Placeholder 2">
-            <a:extLst>
-              <a:ext uri="{FF2B5EF4-FFF2-40B4-BE49-F238E27FC236}">
-                <a16:creationId xmlns:a16="http://schemas.microsoft.com/office/drawing/2014/main" id="{DA107E92-045E-6C21-CA40-9D2CFEBE2F47}"/>
-              </a:ext>
-            </a:extLst>
-          </p:cNvPr>
+            <a:endParaRPr lang="en-US" dirty="0"/>
+          </a:p>
+        </p:txBody>
+      </p:sp>
+      <p:sp>
+        <p:nvSpPr>
+          <p:cNvPr id="3" name="Content Placeholder 2"/>
           <p:cNvSpPr>
             <a:spLocks noGrp="1"/>
           </p:cNvSpPr>
@@ -1273,13 +1262,41 @@
         </p:nvSpPr>
         <p:spPr>
           <a:xfrm>
-            <a:off x="838200" y="1825625"/>
-            <a:ext cx="5181600" cy="4351338"/>
+            <a:off x="1261872" y="1828800"/>
+            <a:ext cx="4480560" cy="4351337"/>
           </a:xfrm>
         </p:spPr>
         <p:txBody>
           <a:bodyPr/>
-          <a:lstStyle/>
+          <a:lstStyle>
+            <a:lvl1pPr>
+              <a:defRPr sz="1800"/>
+            </a:lvl1pPr>
+            <a:lvl2pPr>
+              <a:defRPr sz="1600"/>
+            </a:lvl2pPr>
+            <a:lvl3pPr>
+              <a:defRPr sz="1400"/>
+            </a:lvl3pPr>
+            <a:lvl4pPr>
+              <a:defRPr sz="1400"/>
+            </a:lvl4pPr>
+            <a:lvl5pPr>
+              <a:defRPr sz="1400"/>
+            </a:lvl5pPr>
+            <a:lvl6pPr>
+              <a:defRPr sz="1400"/>
+            </a:lvl6pPr>
+            <a:lvl7pPr>
+              <a:defRPr sz="1400"/>
+            </a:lvl7pPr>
+            <a:lvl8pPr>
+              <a:defRPr sz="1400"/>
+            </a:lvl8pPr>
+            <a:lvl9pPr>
+              <a:defRPr sz="1400"/>
+            </a:lvl9pPr>
+          </a:lstStyle>
           <a:p>
             <a:pPr lvl="0"/>
             <a:r>
@@ -1314,18 +1331,13 @@
               <a:rPr lang="en-US"/>
               <a:t>Fifth level</a:t>
             </a:r>
-          </a:p>
-        </p:txBody>
-      </p:sp>
-      <p:sp>
-        <p:nvSpPr>
-          <p:cNvPr id="4" name="Content Placeholder 3">
-            <a:extLst>
-              <a:ext uri="{FF2B5EF4-FFF2-40B4-BE49-F238E27FC236}">
-                <a16:creationId xmlns:a16="http://schemas.microsoft.com/office/drawing/2014/main" id="{F765C598-B9BD-E80F-073A-57F66C43DD41}"/>
-              </a:ext>
-            </a:extLst>
-          </p:cNvPr>
+            <a:endParaRPr lang="en-US" dirty="0"/>
+          </a:p>
+        </p:txBody>
+      </p:sp>
+      <p:sp>
+        <p:nvSpPr>
+          <p:cNvPr id="4" name="Content Placeholder 3"/>
           <p:cNvSpPr>
             <a:spLocks noGrp="1"/>
           </p:cNvSpPr>
@@ -1335,13 +1347,41 @@
         </p:nvSpPr>
         <p:spPr>
           <a:xfrm>
-            <a:off x="6172200" y="1825625"/>
-            <a:ext cx="5181600" cy="4351338"/>
+            <a:off x="6126480" y="1828800"/>
+            <a:ext cx="4480560" cy="4351337"/>
           </a:xfrm>
         </p:spPr>
         <p:txBody>
           <a:bodyPr/>
-          <a:lstStyle/>
+          <a:lstStyle>
+            <a:lvl1pPr>
+              <a:defRPr sz="1800"/>
+            </a:lvl1pPr>
+            <a:lvl2pPr>
+              <a:defRPr sz="1600"/>
+            </a:lvl2pPr>
+            <a:lvl3pPr>
+              <a:defRPr sz="1400"/>
+            </a:lvl3pPr>
+            <a:lvl4pPr>
+              <a:defRPr sz="1400"/>
+            </a:lvl4pPr>
+            <a:lvl5pPr>
+              <a:defRPr sz="1400"/>
+            </a:lvl5pPr>
+            <a:lvl6pPr>
+              <a:defRPr sz="1400"/>
+            </a:lvl6pPr>
+            <a:lvl7pPr>
+              <a:defRPr sz="1400"/>
+            </a:lvl7pPr>
+            <a:lvl8pPr>
+              <a:defRPr sz="1400"/>
+            </a:lvl8pPr>
+            <a:lvl9pPr>
+              <a:defRPr sz="1400"/>
+            </a:lvl9pPr>
+          </a:lstStyle>
           <a:p>
             <a:pPr lvl="0"/>
             <a:r>
@@ -1376,18 +1416,13 @@
               <a:rPr lang="en-US"/>
               <a:t>Fifth level</a:t>
             </a:r>
-          </a:p>
-        </p:txBody>
-      </p:sp>
-      <p:sp>
-        <p:nvSpPr>
-          <p:cNvPr id="5" name="Date Placeholder 4">
-            <a:extLst>
-              <a:ext uri="{FF2B5EF4-FFF2-40B4-BE49-F238E27FC236}">
-                <a16:creationId xmlns:a16="http://schemas.microsoft.com/office/drawing/2014/main" id="{F2A7C9FE-D7A1-B8B7-84E4-3EEFF8A4EF7D}"/>
-              </a:ext>
-            </a:extLst>
-          </p:cNvPr>
+            <a:endParaRPr lang="en-US" dirty="0"/>
+          </a:p>
+        </p:txBody>
+      </p:sp>
+      <p:sp>
+        <p:nvSpPr>
+          <p:cNvPr id="5" name="Date Placeholder 4"/>
           <p:cNvSpPr>
             <a:spLocks noGrp="1"/>
           </p:cNvSpPr>
@@ -1410,13 +1445,7 @@
       </p:sp>
       <p:sp>
         <p:nvSpPr>
-          <p:cNvPr id="6" name="Footer Placeholder 5">
-            <a:extLst>
-              <a:ext uri="{FF2B5EF4-FFF2-40B4-BE49-F238E27FC236}">
-                <a16:creationId xmlns:a16="http://schemas.microsoft.com/office/drawing/2014/main" id="{E4DCFF05-C24E-C027-39B1-4765A59FD378}"/>
-              </a:ext>
-            </a:extLst>
-          </p:cNvPr>
+          <p:cNvPr id="6" name="Footer Placeholder 5"/>
           <p:cNvSpPr>
             <a:spLocks noGrp="1"/>
           </p:cNvSpPr>
@@ -1435,13 +1464,7 @@
       </p:sp>
       <p:sp>
         <p:nvSpPr>
-          <p:cNvPr id="7" name="Slide Number Placeholder 6">
-            <a:extLst>
-              <a:ext uri="{FF2B5EF4-FFF2-40B4-BE49-F238E27FC236}">
-                <a16:creationId xmlns:a16="http://schemas.microsoft.com/office/drawing/2014/main" id="{0F336906-B75A-3169-EF45-57068D255B23}"/>
-              </a:ext>
-            </a:extLst>
-          </p:cNvPr>
+          <p:cNvPr id="7" name="Slide Number Placeholder 6"/>
           <p:cNvSpPr>
             <a:spLocks noGrp="1"/>
           </p:cNvSpPr>
@@ -1465,7 +1488,7 @@
     </p:spTree>
     <p:extLst>
       <p:ext uri="{BB962C8B-B14F-4D97-AF65-F5344CB8AC3E}">
-        <p14:creationId xmlns:p14="http://schemas.microsoft.com/office/powerpoint/2010/main" val="673222644"/>
+        <p14:creationId xmlns:p14="http://schemas.microsoft.com/office/powerpoint/2010/main" val="2288652533"/>
       </p:ext>
     </p:extLst>
   </p:cSld>
@@ -1494,13 +1517,7 @@
       </p:grpSpPr>
       <p:sp>
         <p:nvSpPr>
-          <p:cNvPr id="2" name="Title 1">
-            <a:extLst>
-              <a:ext uri="{FF2B5EF4-FFF2-40B4-BE49-F238E27FC236}">
-                <a16:creationId xmlns:a16="http://schemas.microsoft.com/office/drawing/2014/main" id="{6BAA21E7-5710-F325-D330-30835974C088}"/>
-              </a:ext>
-            </a:extLst>
-          </p:cNvPr>
+          <p:cNvPr id="10" name="Title 9"/>
           <p:cNvSpPr>
             <a:spLocks noGrp="1"/>
           </p:cNvSpPr>
@@ -1508,51 +1525,50 @@
             <p:ph type="title"/>
           </p:nvPr>
         </p:nvSpPr>
+        <p:spPr/>
+        <p:txBody>
+          <a:bodyPr/>
+          <a:lstStyle/>
+          <a:p>
+            <a:r>
+              <a:rPr lang="en-US"/>
+              <a:t>Click to edit Master title style</a:t>
+            </a:r>
+            <a:endParaRPr lang="en-US" dirty="0"/>
+          </a:p>
+        </p:txBody>
+      </p:sp>
+      <p:sp>
+        <p:nvSpPr>
+          <p:cNvPr id="3" name="Text Placeholder 2"/>
+          <p:cNvSpPr>
+            <a:spLocks noGrp="1"/>
+          </p:cNvSpPr>
+          <p:nvPr>
+            <p:ph type="body" idx="1"/>
+          </p:nvPr>
+        </p:nvSpPr>
         <p:spPr>
           <a:xfrm>
-            <a:off x="839788" y="365125"/>
-            <a:ext cx="10515600" cy="1325563"/>
-          </a:xfrm>
-        </p:spPr>
-        <p:txBody>
-          <a:bodyPr/>
-          <a:lstStyle/>
-          <a:p>
-            <a:r>
-              <a:rPr lang="en-US"/>
-              <a:t>Click to edit Master title style</a:t>
-            </a:r>
-          </a:p>
-        </p:txBody>
-      </p:sp>
-      <p:sp>
-        <p:nvSpPr>
-          <p:cNvPr id="3" name="Text Placeholder 2">
-            <a:extLst>
-              <a:ext uri="{FF2B5EF4-FFF2-40B4-BE49-F238E27FC236}">
-                <a16:creationId xmlns:a16="http://schemas.microsoft.com/office/drawing/2014/main" id="{63F21591-E3BC-DF81-4E2D-8A5AA6CF0F59}"/>
-              </a:ext>
-            </a:extLst>
-          </p:cNvPr>
-          <p:cNvSpPr>
-            <a:spLocks noGrp="1"/>
-          </p:cNvSpPr>
-          <p:nvPr>
-            <p:ph type="body" idx="1"/>
-          </p:nvPr>
-        </p:nvSpPr>
-        <p:spPr>
-          <a:xfrm>
-            <a:off x="839788" y="1681163"/>
-            <a:ext cx="5157787" cy="823912"/>
-          </a:xfrm>
-        </p:spPr>
-        <p:txBody>
-          <a:bodyPr anchor="b"/>
+            <a:off x="1261872" y="1713655"/>
+            <a:ext cx="4480560" cy="731520"/>
+          </a:xfrm>
+        </p:spPr>
+        <p:txBody>
+          <a:bodyPr anchor="b">
+            <a:normAutofit/>
+          </a:bodyPr>
           <a:lstStyle>
             <a:lvl1pPr marL="0" indent="0">
-              <a:buNone/>
-              <a:defRPr sz="2400" b="1"/>
+              <a:spcBef>
+                <a:spcPts val="0"/>
+              </a:spcBef>
+              <a:buNone/>
+              <a:defRPr sz="2000" b="0">
+                <a:solidFill>
+                  <a:schemeClr val="tx2"/>
+                </a:solidFill>
+              </a:defRPr>
             </a:lvl1pPr>
             <a:lvl2pPr marL="457200" indent="0">
               <a:buNone/>
@@ -1598,13 +1614,7 @@
       </p:sp>
       <p:sp>
         <p:nvSpPr>
-          <p:cNvPr id="4" name="Content Placeholder 3">
-            <a:extLst>
-              <a:ext uri="{FF2B5EF4-FFF2-40B4-BE49-F238E27FC236}">
-                <a16:creationId xmlns:a16="http://schemas.microsoft.com/office/drawing/2014/main" id="{C6EE5C4F-69B9-FFE6-CBCD-D8784E3193D1}"/>
-              </a:ext>
-            </a:extLst>
-          </p:cNvPr>
+          <p:cNvPr id="4" name="Content Placeholder 3"/>
           <p:cNvSpPr>
             <a:spLocks noGrp="1"/>
           </p:cNvSpPr>
@@ -1614,13 +1624,41 @@
         </p:nvSpPr>
         <p:spPr>
           <a:xfrm>
-            <a:off x="839788" y="2505075"/>
-            <a:ext cx="5157787" cy="3684588"/>
+            <a:off x="1261872" y="2507550"/>
+            <a:ext cx="4480560" cy="3664650"/>
           </a:xfrm>
         </p:spPr>
         <p:txBody>
           <a:bodyPr/>
-          <a:lstStyle/>
+          <a:lstStyle>
+            <a:lvl1pPr>
+              <a:defRPr sz="1800"/>
+            </a:lvl1pPr>
+            <a:lvl2pPr>
+              <a:defRPr sz="1600"/>
+            </a:lvl2pPr>
+            <a:lvl3pPr>
+              <a:defRPr sz="1400"/>
+            </a:lvl3pPr>
+            <a:lvl4pPr>
+              <a:defRPr sz="1400"/>
+            </a:lvl4pPr>
+            <a:lvl5pPr>
+              <a:defRPr sz="1400"/>
+            </a:lvl5pPr>
+            <a:lvl6pPr>
+              <a:defRPr sz="1400"/>
+            </a:lvl6pPr>
+            <a:lvl7pPr>
+              <a:defRPr sz="1400"/>
+            </a:lvl7pPr>
+            <a:lvl8pPr>
+              <a:defRPr sz="1400"/>
+            </a:lvl8pPr>
+            <a:lvl9pPr>
+              <a:defRPr sz="1400"/>
+            </a:lvl9pPr>
+          </a:lstStyle>
           <a:p>
             <a:pPr lvl="0"/>
             <a:r>
@@ -1655,18 +1693,13 @@
               <a:rPr lang="en-US"/>
               <a:t>Fifth level</a:t>
             </a:r>
-          </a:p>
-        </p:txBody>
-      </p:sp>
-      <p:sp>
-        <p:nvSpPr>
-          <p:cNvPr id="5" name="Text Placeholder 4">
-            <a:extLst>
-              <a:ext uri="{FF2B5EF4-FFF2-40B4-BE49-F238E27FC236}">
-                <a16:creationId xmlns:a16="http://schemas.microsoft.com/office/drawing/2014/main" id="{6A34C917-D285-6E90-7B14-A10387BB3D16}"/>
-              </a:ext>
-            </a:extLst>
-          </p:cNvPr>
+            <a:endParaRPr lang="en-US" dirty="0"/>
+          </a:p>
+        </p:txBody>
+      </p:sp>
+      <p:sp>
+        <p:nvSpPr>
+          <p:cNvPr id="5" name="Text Placeholder 4"/>
           <p:cNvSpPr>
             <a:spLocks noGrp="1"/>
           </p:cNvSpPr>
@@ -1676,16 +1709,31 @@
         </p:nvSpPr>
         <p:spPr>
           <a:xfrm>
-            <a:off x="6172200" y="1681163"/>
-            <a:ext cx="5183188" cy="823912"/>
-          </a:xfrm>
-        </p:spPr>
-        <p:txBody>
-          <a:bodyPr anchor="b"/>
+            <a:off x="6126480" y="1713655"/>
+            <a:ext cx="4480560" cy="731520"/>
+          </a:xfrm>
+        </p:spPr>
+        <p:txBody>
+          <a:bodyPr anchor="b">
+            <a:normAutofit/>
+          </a:bodyPr>
           <a:lstStyle>
             <a:lvl1pPr marL="0" indent="0">
-              <a:buNone/>
-              <a:defRPr sz="2400" b="1"/>
+              <a:lnSpc>
+                <a:spcPct val="95000"/>
+              </a:lnSpc>
+              <a:spcBef>
+                <a:spcPts val="0"/>
+              </a:spcBef>
+              <a:buNone/>
+              <a:defRPr lang="en-US" sz="2000" b="0" kern="1200" dirty="0">
+                <a:solidFill>
+                  <a:schemeClr val="tx2"/>
+                </a:solidFill>
+                <a:latin typeface="+mn-lt"/>
+                <a:ea typeface="+mn-ea"/>
+                <a:cs typeface="+mn-cs"/>
+              </a:defRPr>
             </a:lvl1pPr>
             <a:lvl2pPr marL="457200" indent="0">
               <a:buNone/>
@@ -1721,46 +1769,77 @@
             </a:lvl9pPr>
           </a:lstStyle>
           <a:p>
+            <a:pPr marL="0" lvl="0" indent="0" algn="l" defTabSz="914400" rtl="0" eaLnBrk="1" latinLnBrk="0" hangingPunct="1">
+              <a:lnSpc>
+                <a:spcPct val="90000"/>
+              </a:lnSpc>
+              <a:spcBef>
+                <a:spcPts val="2000"/>
+              </a:spcBef>
+              <a:buFontTx/>
+              <a:buNone/>
+            </a:pPr>
+            <a:r>
+              <a:rPr lang="en-US"/>
+              <a:t>Click to edit Master text styles</a:t>
+            </a:r>
+          </a:p>
+        </p:txBody>
+      </p:sp>
+      <p:sp>
+        <p:nvSpPr>
+          <p:cNvPr id="6" name="Content Placeholder 5"/>
+          <p:cNvSpPr>
+            <a:spLocks noGrp="1"/>
+          </p:cNvSpPr>
+          <p:nvPr>
+            <p:ph sz="quarter" idx="4"/>
+          </p:nvPr>
+        </p:nvSpPr>
+        <p:spPr>
+          <a:xfrm>
+            <a:off x="6126480" y="2507550"/>
+            <a:ext cx="4480560" cy="3664650"/>
+          </a:xfrm>
+        </p:spPr>
+        <p:txBody>
+          <a:bodyPr/>
+          <a:lstStyle>
+            <a:lvl1pPr>
+              <a:defRPr sz="1800"/>
+            </a:lvl1pPr>
+            <a:lvl2pPr>
+              <a:defRPr sz="1600"/>
+            </a:lvl2pPr>
+            <a:lvl3pPr>
+              <a:defRPr sz="1400"/>
+            </a:lvl3pPr>
+            <a:lvl4pPr>
+              <a:defRPr sz="1400"/>
+            </a:lvl4pPr>
+            <a:lvl5pPr>
+              <a:defRPr sz="1400"/>
+            </a:lvl5pPr>
+            <a:lvl6pPr>
+              <a:defRPr sz="1400"/>
+            </a:lvl6pPr>
+            <a:lvl7pPr>
+              <a:defRPr sz="1400"/>
+            </a:lvl7pPr>
+            <a:lvl8pPr>
+              <a:defRPr sz="1400"/>
+            </a:lvl8pPr>
+            <a:lvl9pPr>
+              <a:defRPr sz="1400"/>
+            </a:lvl9pPr>
+          </a:lstStyle>
+          <a:p>
             <a:pPr lvl="0"/>
             <a:r>
               <a:rPr lang="en-US"/>
               <a:t>Click to edit Master text styles</a:t>
             </a:r>
           </a:p>
-        </p:txBody>
-      </p:sp>
-      <p:sp>
-        <p:nvSpPr>
-          <p:cNvPr id="6" name="Content Placeholder 5">
-            <a:extLst>
-              <a:ext uri="{FF2B5EF4-FFF2-40B4-BE49-F238E27FC236}">
-                <a16:creationId xmlns:a16="http://schemas.microsoft.com/office/drawing/2014/main" id="{6A6F8688-89B3-A5AE-D4CD-C72390D5ECE3}"/>
-              </a:ext>
-            </a:extLst>
-          </p:cNvPr>
-          <p:cNvSpPr>
-            <a:spLocks noGrp="1"/>
-          </p:cNvSpPr>
-          <p:nvPr>
-            <p:ph sz="quarter" idx="4"/>
-          </p:nvPr>
-        </p:nvSpPr>
-        <p:spPr>
-          <a:xfrm>
-            <a:off x="6172200" y="2505075"/>
-            <a:ext cx="5183188" cy="3684588"/>
-          </a:xfrm>
-        </p:spPr>
-        <p:txBody>
-          <a:bodyPr/>
-          <a:lstStyle/>
-          <a:p>
-            <a:pPr lvl="0"/>
-            <a:r>
-              <a:rPr lang="en-US"/>
-              <a:t>Click to edit Master text styles</a:t>
-            </a:r>
-          </a:p>
           <a:p>
             <a:pPr lvl="1"/>
             <a:r>
@@ -1788,18 +1867,13 @@
               <a:rPr lang="en-US"/>
               <a:t>Fifth level</a:t>
             </a:r>
-          </a:p>
-        </p:txBody>
-      </p:sp>
-      <p:sp>
-        <p:nvSpPr>
-          <p:cNvPr id="7" name="Date Placeholder 6">
-            <a:extLst>
-              <a:ext uri="{FF2B5EF4-FFF2-40B4-BE49-F238E27FC236}">
-                <a16:creationId xmlns:a16="http://schemas.microsoft.com/office/drawing/2014/main" id="{3C7EA79E-EA24-2BF4-AB68-0662527926FE}"/>
-              </a:ext>
-            </a:extLst>
-          </p:cNvPr>
+            <a:endParaRPr lang="en-US" dirty="0"/>
+          </a:p>
+        </p:txBody>
+      </p:sp>
+      <p:sp>
+        <p:nvSpPr>
+          <p:cNvPr id="7" name="Date Placeholder 6"/>
           <p:cNvSpPr>
             <a:spLocks noGrp="1"/>
           </p:cNvSpPr>
@@ -1822,13 +1896,7 @@
       </p:sp>
       <p:sp>
         <p:nvSpPr>
-          <p:cNvPr id="8" name="Footer Placeholder 7">
-            <a:extLst>
-              <a:ext uri="{FF2B5EF4-FFF2-40B4-BE49-F238E27FC236}">
-                <a16:creationId xmlns:a16="http://schemas.microsoft.com/office/drawing/2014/main" id="{2219786E-8E5C-BA4B-1562-6C26D8EA3F22}"/>
-              </a:ext>
-            </a:extLst>
-          </p:cNvPr>
+          <p:cNvPr id="8" name="Footer Placeholder 7"/>
           <p:cNvSpPr>
             <a:spLocks noGrp="1"/>
           </p:cNvSpPr>
@@ -1847,13 +1915,7 @@
       </p:sp>
       <p:sp>
         <p:nvSpPr>
-          <p:cNvPr id="9" name="Slide Number Placeholder 8">
-            <a:extLst>
-              <a:ext uri="{FF2B5EF4-FFF2-40B4-BE49-F238E27FC236}">
-                <a16:creationId xmlns:a16="http://schemas.microsoft.com/office/drawing/2014/main" id="{635431A6-C9DC-7C2B-E9A3-F1EFBD7342D8}"/>
-              </a:ext>
-            </a:extLst>
-          </p:cNvPr>
+          <p:cNvPr id="9" name="Slide Number Placeholder 8"/>
           <p:cNvSpPr>
             <a:spLocks noGrp="1"/>
           </p:cNvSpPr>
@@ -1877,7 +1939,7 @@
     </p:spTree>
     <p:extLst>
       <p:ext uri="{BB962C8B-B14F-4D97-AF65-F5344CB8AC3E}">
-        <p14:creationId xmlns:p14="http://schemas.microsoft.com/office/powerpoint/2010/main" val="1530689182"/>
+        <p14:creationId xmlns:p14="http://schemas.microsoft.com/office/powerpoint/2010/main" val="845708635"/>
       </p:ext>
     </p:extLst>
   </p:cSld>
@@ -1906,13 +1968,7 @@
       </p:grpSpPr>
       <p:sp>
         <p:nvSpPr>
-          <p:cNvPr id="2" name="Title 1">
-            <a:extLst>
-              <a:ext uri="{FF2B5EF4-FFF2-40B4-BE49-F238E27FC236}">
-                <a16:creationId xmlns:a16="http://schemas.microsoft.com/office/drawing/2014/main" id="{B424C416-2DB9-8A50-3B89-14CDF73DF12F}"/>
-              </a:ext>
-            </a:extLst>
-          </p:cNvPr>
+          <p:cNvPr id="6" name="Title 5"/>
           <p:cNvSpPr>
             <a:spLocks noGrp="1"/>
           </p:cNvSpPr>
@@ -1929,18 +1985,13 @@
               <a:rPr lang="en-US"/>
               <a:t>Click to edit Master title style</a:t>
             </a:r>
-          </a:p>
-        </p:txBody>
-      </p:sp>
-      <p:sp>
-        <p:nvSpPr>
-          <p:cNvPr id="3" name="Date Placeholder 2">
-            <a:extLst>
-              <a:ext uri="{FF2B5EF4-FFF2-40B4-BE49-F238E27FC236}">
-                <a16:creationId xmlns:a16="http://schemas.microsoft.com/office/drawing/2014/main" id="{71C8FB67-863C-3DD8-AE72-74A4B83B0ABA}"/>
-              </a:ext>
-            </a:extLst>
-          </p:cNvPr>
+            <a:endParaRPr lang="en-US" dirty="0"/>
+          </a:p>
+        </p:txBody>
+      </p:sp>
+      <p:sp>
+        <p:nvSpPr>
+          <p:cNvPr id="3" name="Date Placeholder 2"/>
           <p:cNvSpPr>
             <a:spLocks noGrp="1"/>
           </p:cNvSpPr>
@@ -1963,13 +2014,7 @@
       </p:sp>
       <p:sp>
         <p:nvSpPr>
-          <p:cNvPr id="4" name="Footer Placeholder 3">
-            <a:extLst>
-              <a:ext uri="{FF2B5EF4-FFF2-40B4-BE49-F238E27FC236}">
-                <a16:creationId xmlns:a16="http://schemas.microsoft.com/office/drawing/2014/main" id="{E904A825-0032-211A-A088-9F30F45050EC}"/>
-              </a:ext>
-            </a:extLst>
-          </p:cNvPr>
+          <p:cNvPr id="4" name="Footer Placeholder 3"/>
           <p:cNvSpPr>
             <a:spLocks noGrp="1"/>
           </p:cNvSpPr>
@@ -1988,13 +2033,7 @@
       </p:sp>
       <p:sp>
         <p:nvSpPr>
-          <p:cNvPr id="5" name="Slide Number Placeholder 4">
-            <a:extLst>
-              <a:ext uri="{FF2B5EF4-FFF2-40B4-BE49-F238E27FC236}">
-                <a16:creationId xmlns:a16="http://schemas.microsoft.com/office/drawing/2014/main" id="{06A58000-D28A-B544-4C7E-60F7851EE1AD}"/>
-              </a:ext>
-            </a:extLst>
-          </p:cNvPr>
+          <p:cNvPr id="5" name="Slide Number Placeholder 4"/>
           <p:cNvSpPr>
             <a:spLocks noGrp="1"/>
           </p:cNvSpPr>
@@ -2018,7 +2057,7 @@
     </p:spTree>
     <p:extLst>
       <p:ext uri="{BB962C8B-B14F-4D97-AF65-F5344CB8AC3E}">
-        <p14:creationId xmlns:p14="http://schemas.microsoft.com/office/powerpoint/2010/main" val="2911487898"/>
+        <p14:creationId xmlns:p14="http://schemas.microsoft.com/office/powerpoint/2010/main" val="3508171006"/>
       </p:ext>
     </p:extLst>
   </p:cSld>
@@ -2047,13 +2086,7 @@
       </p:grpSpPr>
       <p:sp>
         <p:nvSpPr>
-          <p:cNvPr id="2" name="Date Placeholder 1">
-            <a:extLst>
-              <a:ext uri="{FF2B5EF4-FFF2-40B4-BE49-F238E27FC236}">
-                <a16:creationId xmlns:a16="http://schemas.microsoft.com/office/drawing/2014/main" id="{BDED335F-4B36-DB84-8F0D-7C13A5455F43}"/>
-              </a:ext>
-            </a:extLst>
-          </p:cNvPr>
+          <p:cNvPr id="2" name="Date Placeholder 1"/>
           <p:cNvSpPr>
             <a:spLocks noGrp="1"/>
           </p:cNvSpPr>
@@ -2076,13 +2109,7 @@
       </p:sp>
       <p:sp>
         <p:nvSpPr>
-          <p:cNvPr id="3" name="Footer Placeholder 2">
-            <a:extLst>
-              <a:ext uri="{FF2B5EF4-FFF2-40B4-BE49-F238E27FC236}">
-                <a16:creationId xmlns:a16="http://schemas.microsoft.com/office/drawing/2014/main" id="{87F655D4-3317-AAD2-2773-C25BB1950F3D}"/>
-              </a:ext>
-            </a:extLst>
-          </p:cNvPr>
+          <p:cNvPr id="3" name="Footer Placeholder 2"/>
           <p:cNvSpPr>
             <a:spLocks noGrp="1"/>
           </p:cNvSpPr>
@@ -2101,13 +2128,7 @@
       </p:sp>
       <p:sp>
         <p:nvSpPr>
-          <p:cNvPr id="4" name="Slide Number Placeholder 3">
-            <a:extLst>
-              <a:ext uri="{FF2B5EF4-FFF2-40B4-BE49-F238E27FC236}">
-                <a16:creationId xmlns:a16="http://schemas.microsoft.com/office/drawing/2014/main" id="{C8830123-8C49-E727-B47D-922D77933C0B}"/>
-              </a:ext>
-            </a:extLst>
-          </p:cNvPr>
+          <p:cNvPr id="4" name="Slide Number Placeholder 3"/>
           <p:cNvSpPr>
             <a:spLocks noGrp="1"/>
           </p:cNvSpPr>
@@ -2131,7 +2152,7 @@
     </p:spTree>
     <p:extLst>
       <p:ext uri="{BB962C8B-B14F-4D97-AF65-F5344CB8AC3E}">
-        <p14:creationId xmlns:p14="http://schemas.microsoft.com/office/powerpoint/2010/main" val="241263572"/>
+        <p14:creationId xmlns:p14="http://schemas.microsoft.com/office/powerpoint/2010/main" val="646474607"/>
       </p:ext>
     </p:extLst>
   </p:cSld>
@@ -2160,13 +2181,7 @@
       </p:grpSpPr>
       <p:sp>
         <p:nvSpPr>
-          <p:cNvPr id="2" name="Title 1">
-            <a:extLst>
-              <a:ext uri="{FF2B5EF4-FFF2-40B4-BE49-F238E27FC236}">
-                <a16:creationId xmlns:a16="http://schemas.microsoft.com/office/drawing/2014/main" id="{851FF516-DE0E-25DB-7DDC-0836CC0CB91F}"/>
-              </a:ext>
-            </a:extLst>
-          </p:cNvPr>
+          <p:cNvPr id="2" name="Title 1"/>
           <p:cNvSpPr>
             <a:spLocks noGrp="1"/>
           </p:cNvSpPr>
@@ -2176,15 +2191,17 @@
         </p:nvSpPr>
         <p:spPr>
           <a:xfrm>
-            <a:off x="839788" y="457200"/>
-            <a:ext cx="3932237" cy="1600200"/>
-          </a:xfrm>
-        </p:spPr>
-        <p:txBody>
-          <a:bodyPr anchor="b"/>
+            <a:off x="841248" y="457200"/>
+            <a:ext cx="3200400" cy="1600197"/>
+          </a:xfrm>
+        </p:spPr>
+        <p:txBody>
+          <a:bodyPr anchor="b">
+            <a:normAutofit/>
+          </a:bodyPr>
           <a:lstStyle>
             <a:lvl1pPr>
-              <a:defRPr sz="3200"/>
+              <a:defRPr sz="3200" b="0" baseline="0"/>
             </a:lvl1pPr>
           </a:lstStyle>
           <a:p>
@@ -2192,18 +2209,13 @@
               <a:rPr lang="en-US"/>
               <a:t>Click to edit Master title style</a:t>
             </a:r>
-          </a:p>
-        </p:txBody>
-      </p:sp>
-      <p:sp>
-        <p:nvSpPr>
-          <p:cNvPr id="3" name="Content Placeholder 2">
-            <a:extLst>
-              <a:ext uri="{FF2B5EF4-FFF2-40B4-BE49-F238E27FC236}">
-                <a16:creationId xmlns:a16="http://schemas.microsoft.com/office/drawing/2014/main" id="{891B115A-CBB4-4237-8CD8-62E673906743}"/>
-              </a:ext>
-            </a:extLst>
-          </p:cNvPr>
+            <a:endParaRPr lang="en-US" dirty="0"/>
+          </a:p>
+        </p:txBody>
+      </p:sp>
+      <p:sp>
+        <p:nvSpPr>
+          <p:cNvPr id="3" name="Content Placeholder 2"/>
           <p:cNvSpPr>
             <a:spLocks noGrp="1"/>
           </p:cNvSpPr>
@@ -2213,39 +2225,39 @@
         </p:nvSpPr>
         <p:spPr>
           <a:xfrm>
-            <a:off x="5183188" y="987425"/>
-            <a:ext cx="6172200" cy="4873625"/>
+            <a:off x="4504267" y="685800"/>
+            <a:ext cx="6079066" cy="5486400"/>
           </a:xfrm>
         </p:spPr>
         <p:txBody>
           <a:bodyPr/>
           <a:lstStyle>
             <a:lvl1pPr>
-              <a:defRPr sz="3200"/>
+              <a:defRPr sz="2000"/>
             </a:lvl1pPr>
             <a:lvl2pPr>
-              <a:defRPr sz="2800"/>
+              <a:defRPr sz="1800"/>
             </a:lvl2pPr>
             <a:lvl3pPr>
-              <a:defRPr sz="2400"/>
+              <a:defRPr sz="1600"/>
             </a:lvl3pPr>
             <a:lvl4pPr>
-              <a:defRPr sz="2000"/>
+              <a:defRPr sz="1400"/>
             </a:lvl4pPr>
             <a:lvl5pPr>
-              <a:defRPr sz="2000"/>
+              <a:defRPr sz="1400"/>
             </a:lvl5pPr>
             <a:lvl6pPr>
-              <a:defRPr sz="2000"/>
+              <a:defRPr sz="1400"/>
             </a:lvl6pPr>
             <a:lvl7pPr>
-              <a:defRPr sz="2000"/>
+              <a:defRPr sz="1400"/>
             </a:lvl7pPr>
             <a:lvl8pPr>
-              <a:defRPr sz="2000"/>
+              <a:defRPr sz="1400"/>
             </a:lvl8pPr>
             <a:lvl9pPr>
-              <a:defRPr sz="2000"/>
+              <a:defRPr sz="1400"/>
             </a:lvl9pPr>
           </a:lstStyle>
           <a:p>
@@ -2282,18 +2294,13 @@
               <a:rPr lang="en-US"/>
               <a:t>Fifth level</a:t>
             </a:r>
-          </a:p>
-        </p:txBody>
-      </p:sp>
-      <p:sp>
-        <p:nvSpPr>
-          <p:cNvPr id="4" name="Text Placeholder 3">
-            <a:extLst>
-              <a:ext uri="{FF2B5EF4-FFF2-40B4-BE49-F238E27FC236}">
-                <a16:creationId xmlns:a16="http://schemas.microsoft.com/office/drawing/2014/main" id="{800D79F2-06D6-CCB7-EB0F-28646D288D33}"/>
-              </a:ext>
-            </a:extLst>
-          </p:cNvPr>
+            <a:endParaRPr lang="en-US" dirty="0"/>
+          </a:p>
+        </p:txBody>
+      </p:sp>
+      <p:sp>
+        <p:nvSpPr>
+          <p:cNvPr id="4" name="Text Placeholder 3"/>
           <p:cNvSpPr>
             <a:spLocks noGrp="1"/>
           </p:cNvSpPr>
@@ -2303,48 +2310,56 @@
         </p:nvSpPr>
         <p:spPr>
           <a:xfrm>
-            <a:off x="839788" y="2057400"/>
-            <a:ext cx="3932237" cy="3811588"/>
-          </a:xfrm>
-        </p:spPr>
-        <p:txBody>
-          <a:bodyPr/>
+            <a:off x="841248" y="2099734"/>
+            <a:ext cx="3200400" cy="3810001"/>
+          </a:xfrm>
+        </p:spPr>
+        <p:txBody>
+          <a:bodyPr>
+            <a:normAutofit/>
+          </a:bodyPr>
           <a:lstStyle>
             <a:lvl1pPr marL="0" indent="0">
-              <a:buNone/>
-              <a:defRPr sz="1600"/>
+              <a:lnSpc>
+                <a:spcPct val="114000"/>
+              </a:lnSpc>
+              <a:spcBef>
+                <a:spcPts val="800"/>
+              </a:spcBef>
+              <a:buNone/>
+              <a:defRPr sz="1300"/>
             </a:lvl1pPr>
             <a:lvl2pPr marL="457200" indent="0">
               <a:buNone/>
-              <a:defRPr sz="1400"/>
+              <a:defRPr sz="1200"/>
             </a:lvl2pPr>
             <a:lvl3pPr marL="914400" indent="0">
               <a:buNone/>
-              <a:defRPr sz="1200"/>
+              <a:defRPr sz="1000"/>
             </a:lvl3pPr>
             <a:lvl4pPr marL="1371600" indent="0">
               <a:buNone/>
-              <a:defRPr sz="1000"/>
+              <a:defRPr sz="900"/>
             </a:lvl4pPr>
             <a:lvl5pPr marL="1828800" indent="0">
               <a:buNone/>
-              <a:defRPr sz="1000"/>
+              <a:defRPr sz="900"/>
             </a:lvl5pPr>
             <a:lvl6pPr marL="2286000" indent="0">
               <a:buNone/>
-              <a:defRPr sz="1000"/>
+              <a:defRPr sz="900"/>
             </a:lvl6pPr>
             <a:lvl7pPr marL="2743200" indent="0">
               <a:buNone/>
-              <a:defRPr sz="1000"/>
+              <a:defRPr sz="900"/>
             </a:lvl7pPr>
             <a:lvl8pPr marL="3200400" indent="0">
               <a:buNone/>
-              <a:defRPr sz="1000"/>
+              <a:defRPr sz="900"/>
             </a:lvl8pPr>
             <a:lvl9pPr marL="3657600" indent="0">
               <a:buNone/>
-              <a:defRPr sz="1000"/>
+              <a:defRPr sz="900"/>
             </a:lvl9pPr>
           </a:lstStyle>
           <a:p>
@@ -2358,13 +2373,7 @@
       </p:sp>
       <p:sp>
         <p:nvSpPr>
-          <p:cNvPr id="5" name="Date Placeholder 4">
-            <a:extLst>
-              <a:ext uri="{FF2B5EF4-FFF2-40B4-BE49-F238E27FC236}">
-                <a16:creationId xmlns:a16="http://schemas.microsoft.com/office/drawing/2014/main" id="{2BF90FA4-8992-A8EE-FD18-CA473895E34B}"/>
-              </a:ext>
-            </a:extLst>
-          </p:cNvPr>
+          <p:cNvPr id="5" name="Date Placeholder 4"/>
           <p:cNvSpPr>
             <a:spLocks noGrp="1"/>
           </p:cNvSpPr>
@@ -2387,13 +2396,7 @@
       </p:sp>
       <p:sp>
         <p:nvSpPr>
-          <p:cNvPr id="6" name="Footer Placeholder 5">
-            <a:extLst>
-              <a:ext uri="{FF2B5EF4-FFF2-40B4-BE49-F238E27FC236}">
-                <a16:creationId xmlns:a16="http://schemas.microsoft.com/office/drawing/2014/main" id="{A625C7DF-DB3F-D292-A2F7-44A1119B048E}"/>
-              </a:ext>
-            </a:extLst>
-          </p:cNvPr>
+          <p:cNvPr id="6" name="Footer Placeholder 5"/>
           <p:cNvSpPr>
             <a:spLocks noGrp="1"/>
           </p:cNvSpPr>
@@ -2412,13 +2415,7 @@
       </p:sp>
       <p:sp>
         <p:nvSpPr>
-          <p:cNvPr id="7" name="Slide Number Placeholder 6">
-            <a:extLst>
-              <a:ext uri="{FF2B5EF4-FFF2-40B4-BE49-F238E27FC236}">
-                <a16:creationId xmlns:a16="http://schemas.microsoft.com/office/drawing/2014/main" id="{0BFD462F-7379-0B99-642C-172974B98CAC}"/>
-              </a:ext>
-            </a:extLst>
-          </p:cNvPr>
+          <p:cNvPr id="7" name="Slide Number Placeholder 6"/>
           <p:cNvSpPr>
             <a:spLocks noGrp="1"/>
           </p:cNvSpPr>
@@ -2442,7 +2439,7 @@
     </p:spTree>
     <p:extLst>
       <p:ext uri="{BB962C8B-B14F-4D97-AF65-F5344CB8AC3E}">
-        <p14:creationId xmlns:p14="http://schemas.microsoft.com/office/powerpoint/2010/main" val="2975779486"/>
+        <p14:creationId xmlns:p14="http://schemas.microsoft.com/office/powerpoint/2010/main" val="2730019415"/>
       </p:ext>
     </p:extLst>
   </p:cSld>
@@ -2471,13 +2468,45 @@
       </p:grpSpPr>
       <p:sp>
         <p:nvSpPr>
-          <p:cNvPr id="2" name="Title 1">
-            <a:extLst>
-              <a:ext uri="{FF2B5EF4-FFF2-40B4-BE49-F238E27FC236}">
-                <a16:creationId xmlns:a16="http://schemas.microsoft.com/office/drawing/2014/main" id="{246A7D7D-DF95-DF6A-6797-8AAC0B547E5D}"/>
-              </a:ext>
-            </a:extLst>
-          </p:cNvPr>
+          <p:cNvPr id="8" name="Rectangle 7"/>
+          <p:cNvSpPr/>
+          <p:nvPr/>
+        </p:nvSpPr>
+        <p:spPr>
+          <a:xfrm>
+            <a:off x="0" y="5105400"/>
+            <a:ext cx="11292840" cy="1752600"/>
+          </a:xfrm>
+          <a:prstGeom prst="rect">
+            <a:avLst/>
+          </a:prstGeom>
+          <a:solidFill>
+            <a:srgbClr val="000000"/>
+          </a:solidFill>
+          <a:ln>
+            <a:noFill/>
+          </a:ln>
+        </p:spPr>
+        <p:style>
+          <a:lnRef idx="2">
+            <a:schemeClr val="accent1">
+              <a:shade val="50000"/>
+            </a:schemeClr>
+          </a:lnRef>
+          <a:fillRef idx="1">
+            <a:schemeClr val="accent1"/>
+          </a:fillRef>
+          <a:effectRef idx="0">
+            <a:schemeClr val="accent1"/>
+          </a:effectRef>
+          <a:fontRef idx="minor">
+            <a:schemeClr val="lt1"/>
+          </a:fontRef>
+        </p:style>
+      </p:sp>
+      <p:sp>
+        <p:nvSpPr>
+          <p:cNvPr id="2" name="Title 1"/>
           <p:cNvSpPr>
             <a:spLocks noGrp="1"/>
           </p:cNvSpPr>
@@ -2487,15 +2516,21 @@
         </p:nvSpPr>
         <p:spPr>
           <a:xfrm>
-            <a:off x="839788" y="457200"/>
-            <a:ext cx="3932237" cy="1600200"/>
-          </a:xfrm>
-        </p:spPr>
-        <p:txBody>
-          <a:bodyPr anchor="b"/>
+            <a:off x="914400" y="5257800"/>
+            <a:ext cx="9982200" cy="914400"/>
+          </a:xfrm>
+        </p:spPr>
+        <p:txBody>
+          <a:bodyPr anchor="b">
+            <a:normAutofit/>
+          </a:bodyPr>
           <a:lstStyle>
             <a:lvl1pPr>
-              <a:defRPr sz="3200"/>
+              <a:defRPr sz="2800" b="0">
+                <a:solidFill>
+                  <a:schemeClr val="bg1"/>
+                </a:solidFill>
+              </a:defRPr>
             </a:lvl1pPr>
           </a:lstStyle>
           <a:p>
@@ -2503,20 +2538,15 @@
               <a:rPr lang="en-US"/>
               <a:t>Click to edit Master title style</a:t>
             </a:r>
-          </a:p>
-        </p:txBody>
-      </p:sp>
-      <p:sp>
-        <p:nvSpPr>
-          <p:cNvPr id="3" name="Picture Placeholder 2">
-            <a:extLst>
-              <a:ext uri="{FF2B5EF4-FFF2-40B4-BE49-F238E27FC236}">
-                <a16:creationId xmlns:a16="http://schemas.microsoft.com/office/drawing/2014/main" id="{66E12D16-4E1C-2828-7BCD-1B6158C63BB3}"/>
-              </a:ext>
-            </a:extLst>
-          </p:cNvPr>
-          <p:cNvSpPr>
-            <a:spLocks noGrp="1"/>
+            <a:endParaRPr lang="en-US" dirty="0"/>
+          </a:p>
+        </p:txBody>
+      </p:sp>
+      <p:sp>
+        <p:nvSpPr>
+          <p:cNvPr id="3" name="Picture Placeholder 2"/>
+          <p:cNvSpPr>
+            <a:spLocks noGrp="1" noChangeAspect="1"/>
           </p:cNvSpPr>
           <p:nvPr>
             <p:ph type="pic" idx="1"/>
@@ -2524,16 +2554,23 @@
         </p:nvSpPr>
         <p:spPr>
           <a:xfrm>
-            <a:off x="5183188" y="987425"/>
-            <a:ext cx="6172200" cy="4873625"/>
-          </a:xfrm>
-        </p:spPr>
-        <p:txBody>
-          <a:bodyPr/>
+            <a:off x="0" y="0"/>
+            <a:ext cx="11292840" cy="5128923"/>
+          </a:xfrm>
+          <a:solidFill>
+            <a:schemeClr val="accent1"/>
+          </a:solidFill>
+        </p:spPr>
+        <p:txBody>
+          <a:bodyPr anchor="t"/>
           <a:lstStyle>
             <a:lvl1pPr marL="0" indent="0">
               <a:buNone/>
-              <a:defRPr sz="3200"/>
+              <a:defRPr sz="3200">
+                <a:solidFill>
+                  <a:schemeClr val="bg1"/>
+                </a:solidFill>
+              </a:defRPr>
             </a:lvl1pPr>
             <a:lvl2pPr marL="457200" indent="0">
               <a:buNone/>
@@ -2569,19 +2606,17 @@
             </a:lvl9pPr>
           </a:lstStyle>
           <a:p>
-            <a:endParaRPr lang="en-US"/>
-          </a:p>
-        </p:txBody>
-      </p:sp>
-      <p:sp>
-        <p:nvSpPr>
-          <p:cNvPr id="4" name="Text Placeholder 3">
-            <a:extLst>
-              <a:ext uri="{FF2B5EF4-FFF2-40B4-BE49-F238E27FC236}">
-                <a16:creationId xmlns:a16="http://schemas.microsoft.com/office/drawing/2014/main" id="{6F42B8DD-411E-E2C8-9FA2-5FB62767174F}"/>
-              </a:ext>
-            </a:extLst>
-          </p:cNvPr>
+            <a:r>
+              <a:rPr lang="en-US"/>
+              <a:t>Click icon to add picture</a:t>
+            </a:r>
+            <a:endParaRPr lang="en-US" dirty="0"/>
+          </a:p>
+        </p:txBody>
+      </p:sp>
+      <p:sp>
+        <p:nvSpPr>
+          <p:cNvPr id="4" name="Text Placeholder 3"/>
           <p:cNvSpPr>
             <a:spLocks noGrp="1"/>
           </p:cNvSpPr>
@@ -2591,48 +2626,62 @@
         </p:nvSpPr>
         <p:spPr>
           <a:xfrm>
-            <a:off x="839788" y="2057400"/>
-            <a:ext cx="3932237" cy="3811588"/>
-          </a:xfrm>
-        </p:spPr>
-        <p:txBody>
-          <a:bodyPr/>
+            <a:off x="914400" y="6108589"/>
+            <a:ext cx="9982200" cy="597011"/>
+          </a:xfrm>
+        </p:spPr>
+        <p:txBody>
+          <a:bodyPr>
+            <a:normAutofit/>
+          </a:bodyPr>
           <a:lstStyle>
             <a:lvl1pPr marL="0" indent="0">
-              <a:buNone/>
-              <a:defRPr sz="1600"/>
+              <a:lnSpc>
+                <a:spcPct val="100000"/>
+              </a:lnSpc>
+              <a:spcBef>
+                <a:spcPts val="800"/>
+              </a:spcBef>
+              <a:buNone/>
+              <a:defRPr sz="1300">
+                <a:solidFill>
+                  <a:schemeClr val="bg1">
+                    <a:lumMod val="85000"/>
+                  </a:schemeClr>
+                </a:solidFill>
+              </a:defRPr>
             </a:lvl1pPr>
             <a:lvl2pPr marL="457200" indent="0">
               <a:buNone/>
-              <a:defRPr sz="1400"/>
+              <a:defRPr sz="1200"/>
             </a:lvl2pPr>
             <a:lvl3pPr marL="914400" indent="0">
               <a:buNone/>
-              <a:defRPr sz="1200"/>
+              <a:defRPr sz="1000"/>
             </a:lvl3pPr>
             <a:lvl4pPr marL="1371600" indent="0">
               <a:buNone/>
-              <a:defRPr sz="1000"/>
+              <a:defRPr sz="900"/>
             </a:lvl4pPr>
             <a:lvl5pPr marL="1828800" indent="0">
               <a:buNone/>
-              <a:defRPr sz="1000"/>
+              <a:defRPr sz="900"/>
             </a:lvl5pPr>
             <a:lvl6pPr marL="2286000" indent="0">
               <a:buNone/>
-              <a:defRPr sz="1000"/>
+              <a:defRPr sz="900"/>
             </a:lvl6pPr>
             <a:lvl7pPr marL="2743200" indent="0">
               <a:buNone/>
-              <a:defRPr sz="1000"/>
+              <a:defRPr sz="900"/>
             </a:lvl7pPr>
             <a:lvl8pPr marL="3200400" indent="0">
               <a:buNone/>
-              <a:defRPr sz="1000"/>
+              <a:defRPr sz="900"/>
             </a:lvl8pPr>
             <a:lvl9pPr marL="3657600" indent="0">
               <a:buNone/>
-              <a:defRPr sz="1000"/>
+              <a:defRPr sz="900"/>
             </a:lvl9pPr>
           </a:lstStyle>
           <a:p>
@@ -2646,13 +2695,7 @@
       </p:sp>
       <p:sp>
         <p:nvSpPr>
-          <p:cNvPr id="5" name="Date Placeholder 4">
-            <a:extLst>
-              <a:ext uri="{FF2B5EF4-FFF2-40B4-BE49-F238E27FC236}">
-                <a16:creationId xmlns:a16="http://schemas.microsoft.com/office/drawing/2014/main" id="{CC7C1840-EAFD-0601-D210-4A6EA994C6CB}"/>
-              </a:ext>
-            </a:extLst>
-          </p:cNvPr>
+          <p:cNvPr id="5" name="Date Placeholder 4"/>
           <p:cNvSpPr>
             <a:spLocks noGrp="1"/>
           </p:cNvSpPr>
@@ -2675,13 +2718,7 @@
       </p:sp>
       <p:sp>
         <p:nvSpPr>
-          <p:cNvPr id="6" name="Footer Placeholder 5">
-            <a:extLst>
-              <a:ext uri="{FF2B5EF4-FFF2-40B4-BE49-F238E27FC236}">
-                <a16:creationId xmlns:a16="http://schemas.microsoft.com/office/drawing/2014/main" id="{2948967E-7E0C-1FED-0D4D-1E62D03C867A}"/>
-              </a:ext>
-            </a:extLst>
-          </p:cNvPr>
+          <p:cNvPr id="6" name="Footer Placeholder 5"/>
           <p:cNvSpPr>
             <a:spLocks noGrp="1"/>
           </p:cNvSpPr>
@@ -2700,13 +2737,7 @@
       </p:sp>
       <p:sp>
         <p:nvSpPr>
-          <p:cNvPr id="7" name="Slide Number Placeholder 6">
-            <a:extLst>
-              <a:ext uri="{FF2B5EF4-FFF2-40B4-BE49-F238E27FC236}">
-                <a16:creationId xmlns:a16="http://schemas.microsoft.com/office/drawing/2014/main" id="{1FEE7CEE-8CD9-453A-4CE9-69DA662BAB63}"/>
-              </a:ext>
-            </a:extLst>
-          </p:cNvPr>
+          <p:cNvPr id="7" name="Slide Number Placeholder 6"/>
           <p:cNvSpPr>
             <a:spLocks noGrp="1"/>
           </p:cNvSpPr>
@@ -2730,7 +2761,7 @@
     </p:spTree>
     <p:extLst>
       <p:ext uri="{BB962C8B-B14F-4D97-AF65-F5344CB8AC3E}">
-        <p14:creationId xmlns:p14="http://schemas.microsoft.com/office/powerpoint/2010/main" val="1436609453"/>
+        <p14:creationId xmlns:p14="http://schemas.microsoft.com/office/powerpoint/2010/main" val="2544619703"/>
       </p:ext>
     </p:extLst>
   </p:cSld>
@@ -2764,68 +2795,97 @@
       </p:grpSpPr>
       <p:sp>
         <p:nvSpPr>
-          <p:cNvPr id="2" name="Title Placeholder 1">
-            <a:extLst>
-              <a:ext uri="{FF2B5EF4-FFF2-40B4-BE49-F238E27FC236}">
-                <a16:creationId xmlns:a16="http://schemas.microsoft.com/office/drawing/2014/main" id="{D7973ED3-1340-0FB9-2372-9AF442136A77}"/>
-              </a:ext>
-            </a:extLst>
-          </p:cNvPr>
-          <p:cNvSpPr>
-            <a:spLocks noGrp="1"/>
-          </p:cNvSpPr>
-          <p:nvPr>
-            <p:ph type="title"/>
-          </p:nvPr>
+          <p:cNvPr id="7" name="Rectangle 6"/>
+          <p:cNvSpPr/>
+          <p:nvPr/>
         </p:nvSpPr>
         <p:spPr>
           <a:xfrm>
-            <a:off x="838200" y="365125"/>
-            <a:ext cx="10515600" cy="1325563"/>
+            <a:off x="11292840" y="0"/>
+            <a:ext cx="914400" cy="6858000"/>
           </a:xfrm>
           <a:prstGeom prst="rect">
             <a:avLst/>
           </a:prstGeom>
-        </p:spPr>
-        <p:txBody>
-          <a:bodyPr vert="horz" lIns="91440" tIns="45720" rIns="91440" bIns="45720" rtlCol="0" anchor="ctr">
-            <a:normAutofit/>
-          </a:bodyPr>
-          <a:lstStyle/>
-          <a:p>
-            <a:r>
-              <a:rPr lang="en-US"/>
-              <a:t>Click to edit Master title style</a:t>
-            </a:r>
-          </a:p>
-        </p:txBody>
-      </p:sp>
-      <p:sp>
-        <p:nvSpPr>
-          <p:cNvPr id="3" name="Text Placeholder 2">
-            <a:extLst>
-              <a:ext uri="{FF2B5EF4-FFF2-40B4-BE49-F238E27FC236}">
-                <a16:creationId xmlns:a16="http://schemas.microsoft.com/office/drawing/2014/main" id="{4F9A3727-7B53-DFAB-2430-8478DA2C0A41}"/>
-              </a:ext>
-            </a:extLst>
-          </p:cNvPr>
-          <p:cNvSpPr>
-            <a:spLocks noGrp="1"/>
-          </p:cNvSpPr>
-          <p:nvPr>
-            <p:ph type="body" idx="1"/>
+          <a:solidFill>
+            <a:schemeClr val="tx2">
+              <a:lumMod val="75000"/>
+            </a:schemeClr>
+          </a:solidFill>
+          <a:ln>
+            <a:noFill/>
+          </a:ln>
+        </p:spPr>
+        <p:style>
+          <a:lnRef idx="2">
+            <a:schemeClr val="accent1">
+              <a:shade val="50000"/>
+            </a:schemeClr>
+          </a:lnRef>
+          <a:fillRef idx="1">
+            <a:schemeClr val="accent1"/>
+          </a:fillRef>
+          <a:effectRef idx="0">
+            <a:schemeClr val="accent1"/>
+          </a:effectRef>
+          <a:fontRef idx="minor">
+            <a:schemeClr val="lt1"/>
+          </a:fontRef>
+        </p:style>
+      </p:sp>
+      <p:sp>
+        <p:nvSpPr>
+          <p:cNvPr id="2" name="Title Placeholder 1"/>
+          <p:cNvSpPr>
+            <a:spLocks noGrp="1"/>
+          </p:cNvSpPr>
+          <p:nvPr>
+            <p:ph type="title"/>
           </p:nvPr>
         </p:nvSpPr>
         <p:spPr>
           <a:xfrm>
-            <a:off x="838200" y="1825625"/>
-            <a:ext cx="10515600" cy="4351338"/>
+            <a:off x="1261872" y="365760"/>
+            <a:ext cx="9692640" cy="1325562"/>
           </a:xfrm>
           <a:prstGeom prst="rect">
             <a:avLst/>
           </a:prstGeom>
         </p:spPr>
         <p:txBody>
+          <a:bodyPr vert="horz" lIns="91440" tIns="45720" rIns="91440" bIns="45720" rtlCol="0" anchor="b">
+            <a:normAutofit/>
+          </a:bodyPr>
+          <a:lstStyle/>
+          <a:p>
+            <a:r>
+              <a:rPr lang="en-US"/>
+              <a:t>Click to edit Master title style</a:t>
+            </a:r>
+            <a:endParaRPr lang="en-US" dirty="0"/>
+          </a:p>
+        </p:txBody>
+      </p:sp>
+      <p:sp>
+        <p:nvSpPr>
+          <p:cNvPr id="3" name="Text Placeholder 2"/>
+          <p:cNvSpPr>
+            <a:spLocks noGrp="1"/>
+          </p:cNvSpPr>
+          <p:nvPr>
+            <p:ph type="body" idx="1"/>
+          </p:nvPr>
+        </p:nvSpPr>
+        <p:spPr>
+          <a:xfrm>
+            <a:off x="1261872" y="1828800"/>
+            <a:ext cx="8595360" cy="4351337"/>
+          </a:xfrm>
+          <a:prstGeom prst="rect">
+            <a:avLst/>
+          </a:prstGeom>
+        </p:spPr>
+        <p:txBody>
           <a:bodyPr vert="horz" lIns="91440" tIns="45720" rIns="91440" bIns="45720" rtlCol="0">
             <a:normAutofit/>
           </a:bodyPr>
@@ -2864,18 +2924,13 @@
               <a:rPr lang="en-US"/>
               <a:t>Fifth level</a:t>
             </a:r>
-          </a:p>
-        </p:txBody>
-      </p:sp>
-      <p:sp>
-        <p:nvSpPr>
-          <p:cNvPr id="4" name="Date Placeholder 3">
-            <a:extLst>
-              <a:ext uri="{FF2B5EF4-FFF2-40B4-BE49-F238E27FC236}">
-                <a16:creationId xmlns:a16="http://schemas.microsoft.com/office/drawing/2014/main" id="{6CA556BF-B5CF-543D-4FC4-68D8BEC84814}"/>
-              </a:ext>
-            </a:extLst>
-          </p:cNvPr>
+            <a:endParaRPr lang="en-US" dirty="0"/>
+          </a:p>
+        </p:txBody>
+      </p:sp>
+      <p:sp>
+        <p:nvSpPr>
+          <p:cNvPr id="4" name="Date Placeholder 3"/>
           <p:cNvSpPr>
             <a:spLocks noGrp="1"/>
           </p:cNvSpPr>
@@ -2884,9 +2939,9 @@
           </p:nvPr>
         </p:nvSpPr>
         <p:spPr>
-          <a:xfrm>
-            <a:off x="838200" y="6356350"/>
-            <a:ext cx="2743200" cy="365125"/>
+          <a:xfrm rot="16200000">
+            <a:off x="10797542" y="998537"/>
+            <a:ext cx="1904999" cy="365125"/>
           </a:xfrm>
           <a:prstGeom prst="rect">
             <a:avLst/>
@@ -2895,11 +2950,12 @@
         <p:txBody>
           <a:bodyPr vert="horz" lIns="91440" tIns="45720" rIns="91440" bIns="45720" rtlCol="0" anchor="ctr"/>
           <a:lstStyle>
-            <a:lvl1pPr algn="l">
-              <a:defRPr sz="1200">
+            <a:lvl1pPr algn="r">
+              <a:defRPr sz="1050" b="0">
                 <a:solidFill>
-                  <a:schemeClr val="tx1">
-                    <a:tint val="82000"/>
+                  <a:schemeClr val="tx2">
+                    <a:lumMod val="20000"/>
+                    <a:lumOff val="80000"/>
                   </a:schemeClr>
                 </a:solidFill>
               </a:defRPr>
@@ -2916,13 +2972,7 @@
       </p:sp>
       <p:sp>
         <p:nvSpPr>
-          <p:cNvPr id="5" name="Footer Placeholder 4">
-            <a:extLst>
-              <a:ext uri="{FF2B5EF4-FFF2-40B4-BE49-F238E27FC236}">
-                <a16:creationId xmlns:a16="http://schemas.microsoft.com/office/drawing/2014/main" id="{250CEF55-B068-382F-5C4C-F6E935A2D909}"/>
-              </a:ext>
-            </a:extLst>
-          </p:cNvPr>
+          <p:cNvPr id="5" name="Footer Placeholder 4"/>
           <p:cNvSpPr>
             <a:spLocks noGrp="1"/>
           </p:cNvSpPr>
@@ -2931,9 +2981,9 @@
           </p:nvPr>
         </p:nvSpPr>
         <p:spPr>
-          <a:xfrm>
-            <a:off x="4038600" y="6356350"/>
-            <a:ext cx="4114800" cy="365125"/>
+          <a:xfrm rot="16200000">
+            <a:off x="9959341" y="4046537"/>
+            <a:ext cx="3581400" cy="365125"/>
           </a:xfrm>
           <a:prstGeom prst="rect">
             <a:avLst/>
@@ -2942,11 +2992,12 @@
         <p:txBody>
           <a:bodyPr vert="horz" lIns="91440" tIns="45720" rIns="91440" bIns="45720" rtlCol="0" anchor="ctr"/>
           <a:lstStyle>
-            <a:lvl1pPr algn="ctr">
-              <a:defRPr sz="1200">
+            <a:lvl1pPr algn="l">
+              <a:defRPr sz="1050">
                 <a:solidFill>
-                  <a:schemeClr val="tx1">
-                    <a:tint val="82000"/>
+                  <a:schemeClr val="tx2">
+                    <a:lumMod val="20000"/>
+                    <a:lumOff val="80000"/>
                   </a:schemeClr>
                 </a:solidFill>
               </a:defRPr>
@@ -2959,13 +3010,7 @@
       </p:sp>
       <p:sp>
         <p:nvSpPr>
-          <p:cNvPr id="6" name="Slide Number Placeholder 5">
-            <a:extLst>
-              <a:ext uri="{FF2B5EF4-FFF2-40B4-BE49-F238E27FC236}">
-                <a16:creationId xmlns:a16="http://schemas.microsoft.com/office/drawing/2014/main" id="{77002A6D-9F6D-4AB5-300A-9A9A5D73D85B}"/>
-              </a:ext>
-            </a:extLst>
-          </p:cNvPr>
+          <p:cNvPr id="6" name="Slide Number Placeholder 5"/>
           <p:cNvSpPr>
             <a:spLocks noGrp="1"/>
           </p:cNvSpPr>
@@ -2975,21 +3020,24 @@
         </p:nvSpPr>
         <p:spPr>
           <a:xfrm>
-            <a:off x="8610600" y="6356350"/>
-            <a:ext cx="2743200" cy="365125"/>
+            <a:off x="11292840" y="6172200"/>
+            <a:ext cx="914400" cy="593725"/>
           </a:xfrm>
           <a:prstGeom prst="rect">
             <a:avLst/>
           </a:prstGeom>
         </p:spPr>
         <p:txBody>
-          <a:bodyPr vert="horz" lIns="91440" tIns="45720" rIns="91440" bIns="45720" rtlCol="0" anchor="ctr"/>
+          <a:bodyPr vert="horz" lIns="45720" tIns="45720" rIns="45720" bIns="45720" rtlCol="0" anchor="ctr">
+            <a:normAutofit/>
+          </a:bodyPr>
           <a:lstStyle>
-            <a:lvl1pPr algn="r">
-              <a:defRPr sz="1200">
+            <a:lvl1pPr algn="ctr">
+              <a:defRPr sz="3600">
                 <a:solidFill>
-                  <a:schemeClr val="tx1">
-                    <a:tint val="82000"/>
+                  <a:schemeClr val="tx2">
+                    <a:lumMod val="60000"/>
+                    <a:lumOff val="40000"/>
                   </a:schemeClr>
                 </a:solidFill>
               </a:defRPr>
@@ -3007,23 +3055,23 @@
     </p:spTree>
     <p:extLst>
       <p:ext uri="{BB962C8B-B14F-4D97-AF65-F5344CB8AC3E}">
-        <p14:creationId xmlns:p14="http://schemas.microsoft.com/office/powerpoint/2010/main" val="3863208256"/>
+        <p14:creationId xmlns:p14="http://schemas.microsoft.com/office/powerpoint/2010/main" val="2933819624"/>
       </p:ext>
     </p:extLst>
   </p:cSld>
   <p:clrMap bg1="lt1" tx1="dk1" bg2="lt2" tx2="dk2" accent1="accent1" accent2="accent2" accent3="accent3" accent4="accent4" accent5="accent5" accent6="accent6" hlink="hlink" folHlink="folHlink"/>
   <p:sldLayoutIdLst>
-    <p:sldLayoutId id="2147483649" r:id="rId1"/>
-    <p:sldLayoutId id="2147483650" r:id="rId2"/>
-    <p:sldLayoutId id="2147483651" r:id="rId3"/>
-    <p:sldLayoutId id="2147483652" r:id="rId4"/>
-    <p:sldLayoutId id="2147483653" r:id="rId5"/>
-    <p:sldLayoutId id="2147483654" r:id="rId6"/>
-    <p:sldLayoutId id="2147483655" r:id="rId7"/>
-    <p:sldLayoutId id="2147483656" r:id="rId8"/>
-    <p:sldLayoutId id="2147483657" r:id="rId9"/>
-    <p:sldLayoutId id="2147483658" r:id="rId10"/>
-    <p:sldLayoutId id="2147483659" r:id="rId11"/>
+    <p:sldLayoutId id="2147483661" r:id="rId1"/>
+    <p:sldLayoutId id="2147483662" r:id="rId2"/>
+    <p:sldLayoutId id="2147483663" r:id="rId3"/>
+    <p:sldLayoutId id="2147483664" r:id="rId4"/>
+    <p:sldLayoutId id="2147483665" r:id="rId5"/>
+    <p:sldLayoutId id="2147483666" r:id="rId6"/>
+    <p:sldLayoutId id="2147483667" r:id="rId7"/>
+    <p:sldLayoutId id="2147483668" r:id="rId8"/>
+    <p:sldLayoutId id="2147483669" r:id="rId9"/>
+    <p:sldLayoutId id="2147483670" r:id="rId10"/>
+    <p:sldLayoutId id="2147483671" r:id="rId11"/>
   </p:sldLayoutIdLst>
   <p:txStyles>
     <p:titleStyle>
@@ -3035,7 +3083,7 @@
           <a:spcPct val="0"/>
         </a:spcBef>
         <a:buNone/>
-        <a:defRPr sz="4400" kern="1200">
+        <a:defRPr sz="4400" kern="1200" spc="-50" baseline="0">
           <a:solidFill>
             <a:schemeClr val="tx1"/>
           </a:solidFill>
@@ -3046,16 +3094,23 @@
       </a:lvl1pPr>
     </p:titleStyle>
     <p:bodyStyle>
-      <a:lvl1pPr marL="228600" indent="-228600" algn="l" defTabSz="914400" rtl="0" eaLnBrk="1" latinLnBrk="0" hangingPunct="1">
+      <a:lvl1pPr marL="182880" indent="-182880" algn="l" defTabSz="914400" rtl="0" eaLnBrk="1" latinLnBrk="0" hangingPunct="1">
         <a:lnSpc>
-          <a:spcPct val="90000"/>
+          <a:spcPct val="95000"/>
         </a:lnSpc>
         <a:spcBef>
-          <a:spcPts val="1000"/>
+          <a:spcPts val="1400"/>
         </a:spcBef>
-        <a:buFont typeface="Arial" panose="020B0604020202020204" pitchFamily="34" charset="0"/>
+        <a:spcAft>
+          <a:spcPts val="200"/>
+        </a:spcAft>
+        <a:buClr>
+          <a:schemeClr val="accent1"/>
+        </a:buClr>
+        <a:buSzPct val="80000"/>
+        <a:buFont typeface="Arial" pitchFamily="34" charset="0"/>
         <a:buChar char="•"/>
-        <a:defRPr sz="2800" kern="1200">
+        <a:defRPr sz="1800" kern="1200" spc="10" baseline="0">
           <a:solidFill>
             <a:schemeClr val="tx1"/>
           </a:solidFill>
@@ -3064,144 +3119,216 @@
           <a:cs typeface="+mn-cs"/>
         </a:defRPr>
       </a:lvl1pPr>
-      <a:lvl2pPr marL="685800" indent="-228600" algn="l" defTabSz="914400" rtl="0" eaLnBrk="1" latinLnBrk="0" hangingPunct="1">
+      <a:lvl2pPr marL="457200" indent="-182880" algn="l" defTabSz="914400" rtl="0" eaLnBrk="1" latinLnBrk="0" hangingPunct="1">
         <a:lnSpc>
           <a:spcPct val="90000"/>
         </a:lnSpc>
         <a:spcBef>
-          <a:spcPts val="500"/>
+          <a:spcPts val="300"/>
         </a:spcBef>
-        <a:buFont typeface="Arial" panose="020B0604020202020204" pitchFamily="34" charset="0"/>
-        <a:buChar char="•"/>
-        <a:defRPr sz="2400" kern="1200">
+        <a:spcAft>
+          <a:spcPts val="300"/>
+        </a:spcAft>
+        <a:buClr>
+          <a:schemeClr val="accent1"/>
+        </a:buClr>
+        <a:buFont typeface="Wingdings 2" pitchFamily="18" charset="2"/>
+        <a:buChar char=""/>
+        <a:defRPr sz="1600" kern="1200">
           <a:solidFill>
-            <a:schemeClr val="tx1"/>
+            <a:schemeClr val="tx1">
+              <a:lumMod val="85000"/>
+              <a:lumOff val="15000"/>
+            </a:schemeClr>
           </a:solidFill>
           <a:latin typeface="+mn-lt"/>
           <a:ea typeface="+mn-ea"/>
           <a:cs typeface="+mn-cs"/>
         </a:defRPr>
       </a:lvl2pPr>
-      <a:lvl3pPr marL="1143000" indent="-228600" algn="l" defTabSz="914400" rtl="0" eaLnBrk="1" latinLnBrk="0" hangingPunct="1">
+      <a:lvl3pPr marL="731520" indent="-182880" algn="l" defTabSz="914400" rtl="0" eaLnBrk="1" latinLnBrk="0" hangingPunct="1">
         <a:lnSpc>
           <a:spcPct val="90000"/>
         </a:lnSpc>
         <a:spcBef>
-          <a:spcPts val="500"/>
+          <a:spcPts val="300"/>
         </a:spcBef>
-        <a:buFont typeface="Arial" panose="020B0604020202020204" pitchFamily="34" charset="0"/>
-        <a:buChar char="•"/>
-        <a:defRPr sz="2000" kern="1200">
+        <a:spcAft>
+          <a:spcPts val="300"/>
+        </a:spcAft>
+        <a:buClr>
+          <a:schemeClr val="accent1"/>
+        </a:buClr>
+        <a:buFont typeface="Wingdings 2" pitchFamily="18" charset="2"/>
+        <a:buChar char=""/>
+        <a:defRPr sz="1400" kern="1200">
           <a:solidFill>
-            <a:schemeClr val="tx1"/>
+            <a:schemeClr val="tx1">
+              <a:lumMod val="85000"/>
+              <a:lumOff val="15000"/>
+            </a:schemeClr>
           </a:solidFill>
           <a:latin typeface="+mn-lt"/>
           <a:ea typeface="+mn-ea"/>
           <a:cs typeface="+mn-cs"/>
         </a:defRPr>
       </a:lvl3pPr>
-      <a:lvl4pPr marL="1600200" indent="-228600" algn="l" defTabSz="914400" rtl="0" eaLnBrk="1" latinLnBrk="0" hangingPunct="1">
+      <a:lvl4pPr marL="1005840" indent="-182880" algn="l" defTabSz="914400" rtl="0" eaLnBrk="1" latinLnBrk="0" hangingPunct="1">
         <a:lnSpc>
           <a:spcPct val="90000"/>
         </a:lnSpc>
         <a:spcBef>
-          <a:spcPts val="500"/>
+          <a:spcPts val="300"/>
         </a:spcBef>
-        <a:buFont typeface="Arial" panose="020B0604020202020204" pitchFamily="34" charset="0"/>
-        <a:buChar char="•"/>
-        <a:defRPr sz="1800" kern="1200">
+        <a:spcAft>
+          <a:spcPts val="300"/>
+        </a:spcAft>
+        <a:buClr>
+          <a:schemeClr val="accent1"/>
+        </a:buClr>
+        <a:buFont typeface="Wingdings 2" pitchFamily="18" charset="2"/>
+        <a:buChar char=""/>
+        <a:defRPr sz="1400" kern="1200">
           <a:solidFill>
-            <a:schemeClr val="tx1"/>
+            <a:schemeClr val="tx1">
+              <a:lumMod val="85000"/>
+              <a:lumOff val="15000"/>
+            </a:schemeClr>
           </a:solidFill>
           <a:latin typeface="+mn-lt"/>
           <a:ea typeface="+mn-ea"/>
           <a:cs typeface="+mn-cs"/>
         </a:defRPr>
       </a:lvl4pPr>
-      <a:lvl5pPr marL="2057400" indent="-228600" algn="l" defTabSz="914400" rtl="0" eaLnBrk="1" latinLnBrk="0" hangingPunct="1">
+      <a:lvl5pPr marL="1280160" indent="-182880" algn="l" defTabSz="914400" rtl="0" eaLnBrk="1" latinLnBrk="0" hangingPunct="1">
         <a:lnSpc>
           <a:spcPct val="90000"/>
         </a:lnSpc>
         <a:spcBef>
-          <a:spcPts val="500"/>
+          <a:spcPts val="300"/>
         </a:spcBef>
-        <a:buFont typeface="Arial" panose="020B0604020202020204" pitchFamily="34" charset="0"/>
-        <a:buChar char="•"/>
-        <a:defRPr sz="1800" kern="1200">
+        <a:spcAft>
+          <a:spcPts val="300"/>
+        </a:spcAft>
+        <a:buClr>
+          <a:schemeClr val="accent1"/>
+        </a:buClr>
+        <a:buFont typeface="Wingdings 2" pitchFamily="18" charset="2"/>
+        <a:buChar char=""/>
+        <a:defRPr sz="1400" kern="1200">
           <a:solidFill>
-            <a:schemeClr val="tx1"/>
+            <a:schemeClr val="tx1">
+              <a:lumMod val="85000"/>
+              <a:lumOff val="15000"/>
+            </a:schemeClr>
           </a:solidFill>
           <a:latin typeface="+mn-lt"/>
           <a:ea typeface="+mn-ea"/>
           <a:cs typeface="+mn-cs"/>
         </a:defRPr>
       </a:lvl5pPr>
-      <a:lvl6pPr marL="2514600" indent="-228600" algn="l" defTabSz="914400" rtl="0" eaLnBrk="1" latinLnBrk="0" hangingPunct="1">
+      <a:lvl6pPr marL="1600000" indent="-228600" algn="l" defTabSz="914400" rtl="0" eaLnBrk="1" latinLnBrk="0" hangingPunct="1">
         <a:lnSpc>
           <a:spcPct val="90000"/>
         </a:lnSpc>
         <a:spcBef>
-          <a:spcPts val="500"/>
+          <a:spcPts val="300"/>
         </a:spcBef>
-        <a:buFont typeface="Arial" panose="020B0604020202020204" pitchFamily="34" charset="0"/>
-        <a:buChar char="•"/>
-        <a:defRPr sz="1800" kern="1200">
+        <a:spcAft>
+          <a:spcPts val="300"/>
+        </a:spcAft>
+        <a:buClr>
+          <a:schemeClr val="accent1"/>
+        </a:buClr>
+        <a:buFont typeface="Wingdings 2" pitchFamily="18" charset="2"/>
+        <a:buChar char=""/>
+        <a:defRPr sz="1400" kern="1200">
           <a:solidFill>
-            <a:schemeClr val="tx1"/>
+            <a:schemeClr val="tx1">
+              <a:lumMod val="85000"/>
+              <a:lumOff val="15000"/>
+            </a:schemeClr>
           </a:solidFill>
           <a:latin typeface="+mn-lt"/>
           <a:ea typeface="+mn-ea"/>
           <a:cs typeface="+mn-cs"/>
         </a:defRPr>
       </a:lvl6pPr>
-      <a:lvl7pPr marL="2971800" indent="-228600" algn="l" defTabSz="914400" rtl="0" eaLnBrk="1" latinLnBrk="0" hangingPunct="1">
+      <a:lvl7pPr marL="1900000" indent="-228600" algn="l" defTabSz="914400" rtl="0" eaLnBrk="1" latinLnBrk="0" hangingPunct="1">
         <a:lnSpc>
           <a:spcPct val="90000"/>
         </a:lnSpc>
         <a:spcBef>
-          <a:spcPts val="500"/>
+          <a:spcPts val="300"/>
         </a:spcBef>
-        <a:buFont typeface="Arial" panose="020B0604020202020204" pitchFamily="34" charset="0"/>
-        <a:buChar char="•"/>
-        <a:defRPr sz="1800" kern="1200">
+        <a:spcAft>
+          <a:spcPts val="300"/>
+        </a:spcAft>
+        <a:buClr>
+          <a:schemeClr val="accent1"/>
+        </a:buClr>
+        <a:buFont typeface="Wingdings 2" pitchFamily="18" charset="2"/>
+        <a:buChar char=""/>
+        <a:defRPr sz="1400" kern="1200">
           <a:solidFill>
-            <a:schemeClr val="tx1"/>
+            <a:schemeClr val="tx1">
+              <a:lumMod val="85000"/>
+              <a:lumOff val="15000"/>
+            </a:schemeClr>
           </a:solidFill>
           <a:latin typeface="+mn-lt"/>
           <a:ea typeface="+mn-ea"/>
           <a:cs typeface="+mn-cs"/>
         </a:defRPr>
       </a:lvl7pPr>
-      <a:lvl8pPr marL="3429000" indent="-228600" algn="l" defTabSz="914400" rtl="0" eaLnBrk="1" latinLnBrk="0" hangingPunct="1">
+      <a:lvl8pPr marL="2200000" indent="-228600" algn="l" defTabSz="914400" rtl="0" eaLnBrk="1" latinLnBrk="0" hangingPunct="1">
         <a:lnSpc>
           <a:spcPct val="90000"/>
         </a:lnSpc>
         <a:spcBef>
-          <a:spcPts val="500"/>
+          <a:spcPts val="300"/>
         </a:spcBef>
-        <a:buFont typeface="Arial" panose="020B0604020202020204" pitchFamily="34" charset="0"/>
-        <a:buChar char="•"/>
-        <a:defRPr sz="1800" kern="1200">
+        <a:spcAft>
+          <a:spcPts val="300"/>
+        </a:spcAft>
+        <a:buClr>
+          <a:schemeClr val="accent1"/>
+        </a:buClr>
+        <a:buFont typeface="Wingdings 2" pitchFamily="18" charset="2"/>
+        <a:buChar char=""/>
+        <a:defRPr sz="1400" kern="1200">
           <a:solidFill>
-            <a:schemeClr val="tx1"/>
+            <a:schemeClr val="tx1">
+              <a:lumMod val="85000"/>
+              <a:lumOff val="15000"/>
+            </a:schemeClr>
           </a:solidFill>
           <a:latin typeface="+mn-lt"/>
           <a:ea typeface="+mn-ea"/>
           <a:cs typeface="+mn-cs"/>
         </a:defRPr>
       </a:lvl8pPr>
-      <a:lvl9pPr marL="3886200" indent="-228600" algn="l" defTabSz="914400" rtl="0" eaLnBrk="1" latinLnBrk="0" hangingPunct="1">
+      <a:lvl9pPr marL="2500000" indent="-228600" algn="l" defTabSz="914400" rtl="0" eaLnBrk="1" latinLnBrk="0" hangingPunct="1">
         <a:lnSpc>
           <a:spcPct val="90000"/>
         </a:lnSpc>
         <a:spcBef>
-          <a:spcPts val="500"/>
+          <a:spcPts val="300"/>
         </a:spcBef>
-        <a:buFont typeface="Arial" panose="020B0604020202020204" pitchFamily="34" charset="0"/>
-        <a:buChar char="•"/>
-        <a:defRPr sz="1800" kern="1200">
+        <a:spcAft>
+          <a:spcPts val="300"/>
+        </a:spcAft>
+        <a:buClr>
+          <a:schemeClr val="accent1"/>
+        </a:buClr>
+        <a:buFont typeface="Wingdings 2" pitchFamily="18" charset="2"/>
+        <a:buChar char=""/>
+        <a:defRPr sz="1400" kern="1200">
           <a:solidFill>
-            <a:schemeClr val="tx1"/>
+            <a:schemeClr val="tx1">
+              <a:lumMod val="85000"/>
+              <a:lumOff val="15000"/>
+            </a:schemeClr>
           </a:solidFill>
           <a:latin typeface="+mn-lt"/>
           <a:ea typeface="+mn-ea"/>
@@ -3372,7 +3499,7 @@
         <p:spPr/>
         <p:txBody>
           <a:bodyPr>
-            <a:normAutofit fontScale="77500" lnSpcReduction="20000"/>
+            <a:normAutofit fontScale="55000" lnSpcReduction="20000"/>
           </a:bodyPr>
           <a:lstStyle/>
           <a:p>
@@ -3450,7 +3577,12 @@
             <p:ph type="title"/>
           </p:nvPr>
         </p:nvSpPr>
-        <p:spPr/>
+        <p:spPr>
+          <a:xfrm>
+            <a:off x="460269" y="-223384"/>
+            <a:ext cx="10297862" cy="1325562"/>
+          </a:xfrm>
+        </p:spPr>
         <p:txBody>
           <a:bodyPr/>
           <a:lstStyle/>
@@ -3492,7 +3624,7 @@
         </p:blipFill>
         <p:spPr>
           <a:xfrm>
-            <a:off x="335469" y="1521806"/>
+            <a:off x="122459" y="1521806"/>
             <a:ext cx="5431172" cy="5246110"/>
           </a:xfrm>
           <a:prstGeom prst="rect">
@@ -3522,7 +3654,7 @@
         </p:blipFill>
         <p:spPr>
           <a:xfrm>
-            <a:off x="6506915" y="1521806"/>
+            <a:off x="5776623" y="1521806"/>
             <a:ext cx="5433751" cy="5246110"/>
           </a:xfrm>
           <a:prstGeom prst="rect">
@@ -3576,7 +3708,12 @@
             <p:ph type="title"/>
           </p:nvPr>
         </p:nvSpPr>
-        <p:spPr/>
+        <p:spPr>
+          <a:xfrm>
+            <a:off x="124727" y="68162"/>
+            <a:ext cx="9692640" cy="1325562"/>
+          </a:xfrm>
+        </p:spPr>
         <p:txBody>
           <a:bodyPr/>
           <a:lstStyle/>
@@ -3610,7 +3747,7 @@
         </p:blipFill>
         <p:spPr>
           <a:xfrm>
-            <a:off x="408006" y="1819721"/>
+            <a:off x="124727" y="1819721"/>
             <a:ext cx="4691953" cy="4419517"/>
           </a:xfrm>
           <a:prstGeom prst="rect">
@@ -3640,7 +3777,7 @@
         </p:blipFill>
         <p:spPr>
           <a:xfrm>
-            <a:off x="5695055" y="365125"/>
+            <a:off x="4912200" y="392505"/>
             <a:ext cx="2717673" cy="5874113"/>
           </a:xfrm>
           <a:prstGeom prst="rect">
@@ -3670,7 +3807,7 @@
         </p:blipFill>
         <p:spPr>
           <a:xfrm>
-            <a:off x="8516909" y="384105"/>
+            <a:off x="7725393" y="392505"/>
             <a:ext cx="2732709" cy="1462297"/>
           </a:xfrm>
           <a:prstGeom prst="rect">
@@ -3692,7 +3829,7 @@
         </p:nvSpPr>
         <p:spPr>
           <a:xfrm>
-            <a:off x="331541" y="6266618"/>
+            <a:off x="29207" y="6215520"/>
             <a:ext cx="4639506" cy="523220"/>
           </a:xfrm>
           <a:prstGeom prst="rect">
@@ -3728,7 +3865,7 @@
         </p:nvSpPr>
         <p:spPr>
           <a:xfrm>
-            <a:off x="8455686" y="1926990"/>
+            <a:off x="7629873" y="1957674"/>
             <a:ext cx="3670853" cy="4447371"/>
           </a:xfrm>
           <a:prstGeom prst="rect">
@@ -3949,7 +4086,12 @@
             <p:ph type="title"/>
           </p:nvPr>
         </p:nvSpPr>
-        <p:spPr/>
+        <p:spPr>
+          <a:xfrm>
+            <a:off x="408102" y="-54288"/>
+            <a:ext cx="9692640" cy="1325562"/>
+          </a:xfrm>
+        </p:spPr>
         <p:txBody>
           <a:bodyPr/>
           <a:lstStyle/>
@@ -3983,7 +4125,7 @@
         </p:blipFill>
         <p:spPr>
           <a:xfrm>
-            <a:off x="3628680" y="1478049"/>
+            <a:off x="165042" y="1315492"/>
             <a:ext cx="4934639" cy="981212"/>
           </a:xfrm>
           <a:prstGeom prst="rect">
@@ -4035,7 +4177,7 @@
         </p:nvSpPr>
         <p:spPr>
           <a:xfrm>
-            <a:off x="3628680" y="2503479"/>
+            <a:off x="35634" y="2340922"/>
             <a:ext cx="4884937" cy="523220"/>
           </a:xfrm>
           <a:prstGeom prst="rect">
@@ -4132,7 +4274,7 @@
         </p:blipFill>
         <p:spPr>
           <a:xfrm>
-            <a:off x="6711979" y="3233474"/>
+            <a:off x="6096000" y="3233474"/>
             <a:ext cx="4782217" cy="2810267"/>
           </a:xfrm>
           <a:prstGeom prst="rect">
@@ -4154,7 +4296,7 @@
         </p:nvSpPr>
         <p:spPr>
           <a:xfrm>
-            <a:off x="8376270" y="6043741"/>
+            <a:off x="7787127" y="6043741"/>
             <a:ext cx="1724472" cy="307777"/>
           </a:xfrm>
           <a:prstGeom prst="rect">
@@ -4225,7 +4367,12 @@
             <p:ph type="title"/>
           </p:nvPr>
         </p:nvSpPr>
-        <p:spPr/>
+        <p:spPr>
+          <a:xfrm>
+            <a:off x="584509" y="-87004"/>
+            <a:ext cx="9692640" cy="1325562"/>
+          </a:xfrm>
+        </p:spPr>
         <p:txBody>
           <a:bodyPr/>
           <a:lstStyle/>
@@ -4259,7 +4406,7 @@
         </p:blipFill>
         <p:spPr>
           <a:xfrm>
-            <a:off x="408710" y="1474726"/>
+            <a:off x="165478" y="1439418"/>
             <a:ext cx="3401291" cy="2557619"/>
           </a:xfrm>
           <a:prstGeom prst="rect">
@@ -4289,7 +4436,7 @@
         </p:blipFill>
         <p:spPr>
           <a:xfrm>
-            <a:off x="4410980" y="1474727"/>
+            <a:off x="3926163" y="1487853"/>
             <a:ext cx="3370039" cy="2557619"/>
           </a:xfrm>
           <a:prstGeom prst="rect">
@@ -4319,7 +4466,7 @@
         </p:blipFill>
         <p:spPr>
           <a:xfrm>
-            <a:off x="8381998" y="1487853"/>
+            <a:off x="7725349" y="1487853"/>
             <a:ext cx="3370039" cy="2544493"/>
           </a:xfrm>
           <a:prstGeom prst="rect">
@@ -4341,7 +4488,7 @@
         </p:nvSpPr>
         <p:spPr>
           <a:xfrm>
-            <a:off x="584509" y="4036901"/>
+            <a:off x="165478" y="4010861"/>
             <a:ext cx="3117272" cy="374072"/>
           </a:xfrm>
           <a:prstGeom prst="rect">
@@ -4377,7 +4524,7 @@
         </p:nvSpPr>
         <p:spPr>
           <a:xfrm>
-            <a:off x="4537363" y="3997037"/>
+            <a:off x="3925202" y="3997037"/>
             <a:ext cx="3117272" cy="374072"/>
           </a:xfrm>
           <a:prstGeom prst="rect">
@@ -4413,7 +4560,7 @@
         </p:nvSpPr>
         <p:spPr>
           <a:xfrm>
-            <a:off x="8508381" y="3997037"/>
+            <a:off x="8083782" y="4010938"/>
             <a:ext cx="3117272" cy="374072"/>
           </a:xfrm>
           <a:prstGeom prst="rect">
@@ -4458,7 +4605,7 @@
         </p:blipFill>
         <p:spPr>
           <a:xfrm>
-            <a:off x="4611547" y="4477344"/>
+            <a:off x="3999386" y="4434385"/>
             <a:ext cx="2968903" cy="2249872"/>
           </a:xfrm>
           <a:prstGeom prst="rect">
@@ -4480,7 +4627,7 @@
         </p:nvSpPr>
         <p:spPr>
           <a:xfrm>
-            <a:off x="1420091" y="5081894"/>
+            <a:off x="745031" y="5100305"/>
             <a:ext cx="3117272" cy="1200329"/>
           </a:xfrm>
           <a:prstGeom prst="rect">
@@ -4538,110 +4685,58 @@
 </file>
 
 <file path=ppt/theme/theme1.xml><?xml version="1.0" encoding="utf-8"?>
-<a:theme xmlns:a="http://schemas.openxmlformats.org/drawingml/2006/main" name="Office Theme">
+<a:theme xmlns:a="http://schemas.openxmlformats.org/drawingml/2006/main" name="View">
   <a:themeElements>
-    <a:clrScheme name="Office">
+    <a:clrScheme name="View">
       <a:dk1>
-        <a:sysClr val="windowText" lastClr="000000"/>
+        <a:srgbClr val="000000"/>
       </a:dk1>
       <a:lt1>
-        <a:sysClr val="window" lastClr="FFFFFF"/>
+        <a:srgbClr val="FFFFFF"/>
       </a:lt1>
       <a:dk2>
-        <a:srgbClr val="0E2841"/>
+        <a:srgbClr val="46464A"/>
       </a:dk2>
       <a:lt2>
-        <a:srgbClr val="E8E8E8"/>
+        <a:srgbClr val="D6D3CC"/>
       </a:lt2>
       <a:accent1>
-        <a:srgbClr val="156082"/>
+        <a:srgbClr val="6F6F74"/>
       </a:accent1>
       <a:accent2>
-        <a:srgbClr val="E97132"/>
+        <a:srgbClr val="92A9B9"/>
       </a:accent2>
       <a:accent3>
-        <a:srgbClr val="196B24"/>
+        <a:srgbClr val="A7B789"/>
       </a:accent3>
       <a:accent4>
-        <a:srgbClr val="0F9ED5"/>
+        <a:srgbClr val="B9A489"/>
       </a:accent4>
       <a:accent5>
-        <a:srgbClr val="A02B93"/>
+        <a:srgbClr val="8D6374"/>
       </a:accent5>
       <a:accent6>
-        <a:srgbClr val="4EA72E"/>
+        <a:srgbClr val="9B7362"/>
       </a:accent6>
       <a:hlink>
-        <a:srgbClr val="467886"/>
+        <a:srgbClr val="67AABF"/>
       </a:hlink>
       <a:folHlink>
-        <a:srgbClr val="96607D"/>
+        <a:srgbClr val="ABAFA5"/>
       </a:folHlink>
     </a:clrScheme>
-    <a:fontScheme name="Office">
+    <a:fontScheme name="View">
       <a:majorFont>
-        <a:latin typeface="Aptos Display" panose="02110004020202020204"/>
+        <a:latin typeface="Century Schoolbook" panose="02040604050505020304"/>
         <a:ea typeface=""/>
         <a:cs typeface=""/>
-        <a:font script="Jpan" typeface="游ゴシック Light"/>
+        <a:font script="Jpan" typeface="ＭＳ ゴシック"/>
         <a:font script="Hang" typeface="맑은 고딕"/>
-        <a:font script="Hans" typeface="等线 Light"/>
+        <a:font script="Hans" typeface="宋体"/>
         <a:font script="Hant" typeface="新細明體"/>
-        <a:font script="Arab" typeface="Times New Roman"/>
-        <a:font script="Hebr" typeface="Times New Roman"/>
-        <a:font script="Thai" typeface="Angsana New"/>
-        <a:font script="Ethi" typeface="Nyala"/>
-        <a:font script="Beng" typeface="Vrinda"/>
-        <a:font script="Gujr" typeface="Shruti"/>
-        <a:font script="Khmr" typeface="MoolBoran"/>
-        <a:font script="Knda" typeface="Tunga"/>
-        <a:font script="Guru" typeface="Raavi"/>
-        <a:font script="Cans" typeface="Euphemia"/>
-        <a:font script="Cher" typeface="Plantagenet Cherokee"/>
-        <a:font script="Yiii" typeface="Microsoft Yi Baiti"/>
-        <a:font script="Tibt" typeface="Microsoft Himalaya"/>
-        <a:font script="Thaa" typeface="MV Boli"/>
-        <a:font script="Deva" typeface="Mangal"/>
-        <a:font script="Telu" typeface="Gautami"/>
-        <a:font script="Taml" typeface="Latha"/>
-        <a:font script="Syrc" typeface="Estrangelo Edessa"/>
-        <a:font script="Orya" typeface="Kalinga"/>
-        <a:font script="Mlym" typeface="Kartika"/>
-        <a:font script="Laoo" typeface="DokChampa"/>
-        <a:font script="Sinh" typeface="Iskoola Pota"/>
-        <a:font script="Mong" typeface="Mongolian Baiti"/>
-        <a:font script="Viet" typeface="Times New Roman"/>
-        <a:font script="Uigh" typeface="Microsoft Uighur"/>
-        <a:font script="Geor" typeface="Sylfaen"/>
-        <a:font script="Armn" typeface="Arial"/>
-        <a:font script="Bugi" typeface="Leelawadee UI"/>
-        <a:font script="Bopo" typeface="Microsoft JhengHei"/>
-        <a:font script="Java" typeface="Javanese Text"/>
-        <a:font script="Lisu" typeface="Segoe UI"/>
-        <a:font script="Mymr" typeface="Myanmar Text"/>
-        <a:font script="Nkoo" typeface="Ebrima"/>
-        <a:font script="Olck" typeface="Nirmala UI"/>
-        <a:font script="Osma" typeface="Ebrima"/>
-        <a:font script="Phag" typeface="Phagspa"/>
-        <a:font script="Syrn" typeface="Estrangelo Edessa"/>
-        <a:font script="Syrj" typeface="Estrangelo Edessa"/>
-        <a:font script="Syre" typeface="Estrangelo Edessa"/>
-        <a:font script="Sora" typeface="Nirmala UI"/>
-        <a:font script="Tale" typeface="Microsoft Tai Le"/>
-        <a:font script="Talu" typeface="Microsoft New Tai Lue"/>
-        <a:font script="Tfng" typeface="Ebrima"/>
-      </a:majorFont>
-      <a:minorFont>
-        <a:latin typeface="Aptos" panose="02110004020202020204"/>
-        <a:ea typeface=""/>
-        <a:cs typeface=""/>
-        <a:font script="Jpan" typeface="游ゴシック"/>
-        <a:font script="Hang" typeface="맑은 고딕"/>
-        <a:font script="Hans" typeface="等线"/>
-        <a:font script="Hant" typeface="新細明體"/>
-        <a:font script="Arab" typeface="Arial"/>
-        <a:font script="Hebr" typeface="Arial"/>
-        <a:font script="Thai" typeface="Cordia New"/>
+        <a:font script="Arab" typeface="Tahoma"/>
+        <a:font script="Hebr" typeface="Gisha"/>
+        <a:font script="Thai" typeface="DilleniaUPC"/>
         <a:font script="Ethi" typeface="Nyala"/>
         <a:font script="Beng" typeface="Vrinda"/>
         <a:font script="Gujr" typeface="Shruti"/>
@@ -4662,107 +4757,86 @@
         <a:font script="Laoo" typeface="DokChampa"/>
         <a:font script="Sinh" typeface="Iskoola Pota"/>
         <a:font script="Mong" typeface="Mongolian Baiti"/>
-        <a:font script="Viet" typeface="Arial"/>
+        <a:font script="Viet" typeface="Tahoma"/>
         <a:font script="Uigh" typeface="Microsoft Uighur"/>
         <a:font script="Geor" typeface="Sylfaen"/>
-        <a:font script="Armn" typeface="Arial"/>
-        <a:font script="Bugi" typeface="Leelawadee UI"/>
-        <a:font script="Bopo" typeface="Microsoft JhengHei"/>
-        <a:font script="Java" typeface="Javanese Text"/>
-        <a:font script="Lisu" typeface="Segoe UI"/>
-        <a:font script="Mymr" typeface="Myanmar Text"/>
-        <a:font script="Nkoo" typeface="Ebrima"/>
-        <a:font script="Olck" typeface="Nirmala UI"/>
-        <a:font script="Osma" typeface="Ebrima"/>
-        <a:font script="Phag" typeface="Phagspa"/>
-        <a:font script="Syrn" typeface="Estrangelo Edessa"/>
-        <a:font script="Syrj" typeface="Estrangelo Edessa"/>
-        <a:font script="Syre" typeface="Estrangelo Edessa"/>
-        <a:font script="Sora" typeface="Nirmala UI"/>
-        <a:font script="Tale" typeface="Microsoft Tai Le"/>
-        <a:font script="Talu" typeface="Microsoft New Tai Lue"/>
-        <a:font script="Tfng" typeface="Ebrima"/>
+      </a:majorFont>
+      <a:minorFont>
+        <a:latin typeface="Century Schoolbook" panose="02040604050505020304"/>
+        <a:ea typeface=""/>
+        <a:cs typeface=""/>
+        <a:font script="Jpan" typeface="ＭＳ ゴシック"/>
+        <a:font script="Hang" typeface="맑은 고딕"/>
+        <a:font script="Hans" typeface="宋体"/>
+        <a:font script="Hant" typeface="新細明體"/>
+        <a:font script="Arab" typeface="Tahoma"/>
+        <a:font script="Hebr" typeface="Gisha"/>
+        <a:font script="Thai" typeface="DilleniaUPC"/>
+        <a:font script="Ethi" typeface="Nyala"/>
+        <a:font script="Beng" typeface="Vrinda"/>
+        <a:font script="Gujr" typeface="Shruti"/>
+        <a:font script="Khmr" typeface="DaunPenh"/>
+        <a:font script="Knda" typeface="Tunga"/>
+        <a:font script="Guru" typeface="Raavi"/>
+        <a:font script="Cans" typeface="Euphemia"/>
+        <a:font script="Cher" typeface="Plantagenet Cherokee"/>
+        <a:font script="Yiii" typeface="Microsoft Yi Baiti"/>
+        <a:font script="Tibt" typeface="Microsoft Himalaya"/>
+        <a:font script="Thaa" typeface="MV Boli"/>
+        <a:font script="Deva" typeface="Mangal"/>
+        <a:font script="Telu" typeface="Gautami"/>
+        <a:font script="Taml" typeface="Latha"/>
+        <a:font script="Syrc" typeface="Estrangelo Edessa"/>
+        <a:font script="Orya" typeface="Kalinga"/>
+        <a:font script="Mlym" typeface="Kartika"/>
+        <a:font script="Laoo" typeface="DokChampa"/>
+        <a:font script="Sinh" typeface="Iskoola Pota"/>
+        <a:font script="Mong" typeface="Mongolian Baiti"/>
+        <a:font script="Viet" typeface="Verdana"/>
+        <a:font script="Uigh" typeface="Microsoft Uighur"/>
+        <a:font script="Geor" typeface="Sylfaen"/>
       </a:minorFont>
     </a:fontScheme>
-    <a:fmtScheme name="Office">
+    <a:fmtScheme name="View">
       <a:fillStyleLst>
         <a:solidFill>
           <a:schemeClr val="phClr"/>
         </a:solidFill>
-        <a:gradFill rotWithShape="1">
-          <a:gsLst>
-            <a:gs pos="0">
-              <a:schemeClr val="phClr">
-                <a:lumMod val="110000"/>
-                <a:satMod val="105000"/>
-                <a:tint val="67000"/>
-              </a:schemeClr>
-            </a:gs>
-            <a:gs pos="50000">
-              <a:schemeClr val="phClr">
-                <a:lumMod val="105000"/>
-                <a:satMod val="103000"/>
-                <a:tint val="73000"/>
-              </a:schemeClr>
-            </a:gs>
-            <a:gs pos="100000">
-              <a:schemeClr val="phClr">
-                <a:lumMod val="105000"/>
-                <a:satMod val="109000"/>
-                <a:tint val="81000"/>
-              </a:schemeClr>
-            </a:gs>
-          </a:gsLst>
-          <a:lin ang="5400000" scaled="0"/>
-        </a:gradFill>
-        <a:gradFill rotWithShape="1">
-          <a:gsLst>
-            <a:gs pos="0">
-              <a:schemeClr val="phClr">
-                <a:satMod val="103000"/>
-                <a:lumMod val="102000"/>
-                <a:tint val="94000"/>
-              </a:schemeClr>
-            </a:gs>
-            <a:gs pos="50000">
-              <a:schemeClr val="phClr">
-                <a:satMod val="110000"/>
-                <a:lumMod val="100000"/>
-                <a:shade val="100000"/>
-              </a:schemeClr>
-            </a:gs>
-            <a:gs pos="100000">
-              <a:schemeClr val="phClr">
-                <a:lumMod val="99000"/>
-                <a:satMod val="120000"/>
-                <a:shade val="78000"/>
-              </a:schemeClr>
-            </a:gs>
-          </a:gsLst>
-          <a:lin ang="5400000" scaled="0"/>
-        </a:gradFill>
+        <a:solidFill>
+          <a:schemeClr val="phClr">
+            <a:tint val="60000"/>
+            <a:satMod val="120000"/>
+          </a:schemeClr>
+        </a:solidFill>
+        <a:solidFill>
+          <a:schemeClr val="phClr">
+            <a:shade val="75000"/>
+            <a:satMod val="160000"/>
+          </a:schemeClr>
+        </a:solidFill>
       </a:fillStyleLst>
       <a:lnStyleLst>
-        <a:ln w="12700" cap="flat" cmpd="sng" algn="ctr">
+        <a:ln w="9525" cap="flat" cmpd="sng" algn="ctr">
           <a:solidFill>
             <a:schemeClr val="phClr"/>
           </a:solidFill>
           <a:prstDash val="solid"/>
-          <a:miter lim="800000"/>
         </a:ln>
-        <a:ln w="19050" cap="flat" cmpd="sng" algn="ctr">
+        <a:ln w="13970" cap="flat" cmpd="sng" algn="ctr">
           <a:solidFill>
             <a:schemeClr val="phClr"/>
           </a:solidFill>
           <a:prstDash val="solid"/>
-          <a:miter lim="800000"/>
         </a:ln>
-        <a:ln w="25400" cap="flat" cmpd="sng" algn="ctr">
+        <a:ln w="17145" cap="flat" cmpd="sng" algn="ctr">
           <a:solidFill>
-            <a:schemeClr val="phClr"/>
+            <a:schemeClr val="phClr">
+              <a:shade val="95000"/>
+              <a:alpha val="95000"/>
+              <a:satMod val="150000"/>
+            </a:schemeClr>
           </a:solidFill>
           <a:prstDash val="solid"/>
-          <a:miter lim="800000"/>
         </a:ln>
       </a:lnStyleLst>
       <a:effectStyleLst>
@@ -4770,16 +4844,52 @@
           <a:effectLst/>
         </a:effectStyle>
         <a:effectStyle>
-          <a:effectLst/>
+          <a:effectLst>
+            <a:outerShdw blurRad="50800" dist="15240" dir="5400000" algn="tl" rotWithShape="0">
+              <a:srgbClr val="000000">
+                <a:alpha val="75000"/>
+              </a:srgbClr>
+            </a:outerShdw>
+          </a:effectLst>
+          <a:scene3d>
+            <a:camera prst="orthographicFront">
+              <a:rot lat="0" lon="0" rev="0"/>
+            </a:camera>
+            <a:lightRig rig="brightRoom" dir="tl"/>
+          </a:scene3d>
+          <a:sp3d contourW="9525" prstMaterial="flat">
+            <a:bevelT w="0" h="0" prst="coolSlant"/>
+            <a:contourClr>
+              <a:schemeClr val="phClr">
+                <a:shade val="35000"/>
+                <a:satMod val="130000"/>
+              </a:schemeClr>
+            </a:contourClr>
+          </a:sp3d>
         </a:effectStyle>
         <a:effectStyle>
           <a:effectLst>
-            <a:outerShdw blurRad="57150" dist="19050" dir="5400000" algn="ctr" rotWithShape="0">
+            <a:outerShdw blurRad="76200" dist="25400" dir="5400000" algn="tl" rotWithShape="0">
               <a:srgbClr val="000000">
-                <a:alpha val="63000"/>
+                <a:alpha val="55000"/>
               </a:srgbClr>
             </a:outerShdw>
           </a:effectLst>
+          <a:scene3d>
+            <a:camera prst="orthographicFront">
+              <a:rot lat="0" lon="0" rev="0"/>
+            </a:camera>
+            <a:lightRig rig="brightRoom" dir="tl"/>
+          </a:scene3d>
+          <a:sp3d contourW="19050" prstMaterial="flat">
+            <a:bevelT w="0" h="0" prst="coolSlant"/>
+            <a:contourClr>
+              <a:schemeClr val="phClr">
+                <a:shade val="25000"/>
+                <a:satMod val="140000"/>
+              </a:schemeClr>
+            </a:contourClr>
+          </a:sp3d>
         </a:effectStyle>
       </a:effectStyleLst>
       <a:bgFillStyleLst>
@@ -4796,57 +4906,32 @@
           <a:gsLst>
             <a:gs pos="0">
               <a:schemeClr val="phClr">
-                <a:tint val="93000"/>
-                <a:satMod val="150000"/>
+                <a:tint val="94000"/>
                 <a:shade val="98000"/>
+                <a:satMod val="130000"/>
                 <a:lumMod val="102000"/>
-              </a:schemeClr>
-            </a:gs>
-            <a:gs pos="50000">
-              <a:schemeClr val="phClr">
-                <a:tint val="98000"/>
-                <a:satMod val="130000"/>
-                <a:shade val="90000"/>
-                <a:lumMod val="103000"/>
               </a:schemeClr>
             </a:gs>
             <a:gs pos="100000">
               <a:schemeClr val="phClr">
-                <a:shade val="63000"/>
-                <a:satMod val="120000"/>
+                <a:tint val="98000"/>
+                <a:shade val="78000"/>
+                <a:satMod val="140000"/>
               </a:schemeClr>
             </a:gs>
           </a:gsLst>
-          <a:lin ang="5400000" scaled="0"/>
+          <a:path path="circle">
+            <a:fillToRect l="100000" t="100000" r="100000" b="100000"/>
+          </a:path>
         </a:gradFill>
       </a:bgFillStyleLst>
     </a:fmtScheme>
   </a:themeElements>
-  <a:objectDefaults>
-    <a:lnDef>
-      <a:spPr/>
-      <a:bodyPr/>
-      <a:lstStyle/>
-      <a:style>
-        <a:lnRef idx="2">
-          <a:schemeClr val="accent1"/>
-        </a:lnRef>
-        <a:fillRef idx="0">
-          <a:schemeClr val="accent1"/>
-        </a:fillRef>
-        <a:effectRef idx="1">
-          <a:schemeClr val="accent1"/>
-        </a:effectRef>
-        <a:fontRef idx="minor">
-          <a:schemeClr val="tx1"/>
-        </a:fontRef>
-      </a:style>
-    </a:lnDef>
-  </a:objectDefaults>
+  <a:objectDefaults/>
   <a:extraClrSchemeLst/>
   <a:extLst>
     <a:ext uri="{05A4C25C-085E-4340-85A3-A5531E510DB2}">
-      <thm15:themeFamily xmlns:thm15="http://schemas.microsoft.com/office/thememl/2012/main" name="Office Theme" id="{2E142A2C-CD16-42D6-873A-C26D2A0506FA}" vid="{1BDDFF52-6CD6-40A5-AB3C-68EB2F1E4D0A}"/>
+      <thm15:themeFamily xmlns:thm15="http://schemas.microsoft.com/office/thememl/2012/main" name="View" id="{BA0EB5A6-F2D4-4F82-977B-64ADEE4A2A69}" vid="{3969A8A2-35DB-4E3B-8885-16FD20568674}"/>
     </a:ext>
   </a:extLst>
 </a:theme>
